--- a/docs/pptx/whole/ritu-linsubhr-ratio-anemia3_10pct.pptx
+++ b/docs/pptx/whole/ritu-linsubhr-ratio-anemia3_10pct.pptx
@@ -2443,7 +2443,7 @@
           </p:nvSpPr>
           <p:spPr>
             <a:xfrm>
-              <a:off x="955490" y="2073503"/>
+              <a:off x="957589" y="2073503"/>
               <a:ext cx="0" cy="3649639"/>
             </a:xfrm>
             <a:custGeom>
@@ -2486,7 +2486,7 @@
           </p:nvSpPr>
           <p:spPr>
             <a:xfrm>
-              <a:off x="1892768" y="2073503"/>
+              <a:off x="1893867" y="2073503"/>
               <a:ext cx="0" cy="3649639"/>
             </a:xfrm>
             <a:custGeom>
@@ -2529,7 +2529,7 @@
           </p:nvSpPr>
           <p:spPr>
             <a:xfrm>
-              <a:off x="2830046" y="2073503"/>
+              <a:off x="2830144" y="2073503"/>
               <a:ext cx="0" cy="3649639"/>
             </a:xfrm>
             <a:custGeom>
@@ -2572,7 +2572,7 @@
           </p:nvSpPr>
           <p:spPr>
             <a:xfrm>
-              <a:off x="3767323" y="2073503"/>
+              <a:off x="3766422" y="2073503"/>
               <a:ext cx="0" cy="3649639"/>
             </a:xfrm>
             <a:custGeom>
@@ -2615,7 +2615,7 @@
           </p:nvSpPr>
           <p:spPr>
             <a:xfrm>
-              <a:off x="4704601" y="2073503"/>
+              <a:off x="4702700" y="2073503"/>
               <a:ext cx="0" cy="3649639"/>
             </a:xfrm>
             <a:custGeom>
@@ -2658,7 +2658,7 @@
           </p:nvSpPr>
           <p:spPr>
             <a:xfrm>
-              <a:off x="5641878" y="2073503"/>
+              <a:off x="5638978" y="2073503"/>
               <a:ext cx="0" cy="3649639"/>
             </a:xfrm>
             <a:custGeom>
@@ -2701,7 +2701,7 @@
           </p:nvSpPr>
           <p:spPr>
             <a:xfrm>
-              <a:off x="6579156" y="2073503"/>
+              <a:off x="6575256" y="2073503"/>
               <a:ext cx="0" cy="3649639"/>
             </a:xfrm>
             <a:custGeom>
@@ -2744,7 +2744,7 @@
           </p:nvSpPr>
           <p:spPr>
             <a:xfrm>
-              <a:off x="7516433" y="2073503"/>
+              <a:off x="7511534" y="2073503"/>
               <a:ext cx="0" cy="3649639"/>
             </a:xfrm>
             <a:custGeom>
@@ -2787,7 +2787,7 @@
           </p:nvSpPr>
           <p:spPr>
             <a:xfrm>
-              <a:off x="8453711" y="2073503"/>
+              <a:off x="8447812" y="2073503"/>
               <a:ext cx="0" cy="3649639"/>
             </a:xfrm>
             <a:custGeom>
@@ -3045,7 +3045,7 @@
           </p:nvSpPr>
           <p:spPr>
             <a:xfrm>
-              <a:off x="1424129" y="2073503"/>
+              <a:off x="1425728" y="2073503"/>
               <a:ext cx="0" cy="3649639"/>
             </a:xfrm>
             <a:custGeom>
@@ -3088,7 +3088,7 @@
           </p:nvSpPr>
           <p:spPr>
             <a:xfrm>
-              <a:off x="2361407" y="2073503"/>
+              <a:off x="2362006" y="2073503"/>
               <a:ext cx="0" cy="3649639"/>
             </a:xfrm>
             <a:custGeom>
@@ -3131,7 +3131,7 @@
           </p:nvSpPr>
           <p:spPr>
             <a:xfrm>
-              <a:off x="3298684" y="2073503"/>
+              <a:off x="3298283" y="2073503"/>
               <a:ext cx="0" cy="3649639"/>
             </a:xfrm>
             <a:custGeom>
@@ -3174,7 +3174,7 @@
           </p:nvSpPr>
           <p:spPr>
             <a:xfrm>
-              <a:off x="4235962" y="2073503"/>
+              <a:off x="4234561" y="2073503"/>
               <a:ext cx="0" cy="3649639"/>
             </a:xfrm>
             <a:custGeom>
@@ -3217,7 +3217,7 @@
           </p:nvSpPr>
           <p:spPr>
             <a:xfrm>
-              <a:off x="5173239" y="2073503"/>
+              <a:off x="5170839" y="2073503"/>
               <a:ext cx="0" cy="3649639"/>
             </a:xfrm>
             <a:custGeom>
@@ -3260,7 +3260,7 @@
           </p:nvSpPr>
           <p:spPr>
             <a:xfrm>
-              <a:off x="6110517" y="2073503"/>
+              <a:off x="6107117" y="2073503"/>
               <a:ext cx="0" cy="3649639"/>
             </a:xfrm>
             <a:custGeom>
@@ -3303,7 +3303,7 @@
           </p:nvSpPr>
           <p:spPr>
             <a:xfrm>
-              <a:off x="7047795" y="2073503"/>
+              <a:off x="7043395" y="2073503"/>
               <a:ext cx="0" cy="3649639"/>
             </a:xfrm>
             <a:custGeom>
@@ -3346,7 +3346,7 @@
           </p:nvSpPr>
           <p:spPr>
             <a:xfrm>
-              <a:off x="7985072" y="2073503"/>
+              <a:off x="7979673" y="2073503"/>
               <a:ext cx="0" cy="3649639"/>
             </a:xfrm>
             <a:custGeom>
@@ -3390,557 +3390,557 @@
           <p:spPr>
             <a:xfrm>
               <a:off x="1172049" y="2073503"/>
-              <a:ext cx="7090630" cy="3445696"/>
+              <a:ext cx="7090630" cy="3445752"/>
             </a:xfrm>
             <a:custGeom>
               <a:avLst/>
               <a:pathLst>
-                <a:path w="7090630" h="3445696">
+                <a:path w="7090630" h="3445752">
                   <a:moveTo>
-                    <a:pt x="1303051" y="0"/>
+                    <a:pt x="1304320" y="0"/>
                   </a:moveTo>
                   <a:lnTo>
-                    <a:pt x="1360827" y="154394"/>
-                  </a:lnTo>
-                  <a:lnTo>
-                    <a:pt x="1432450" y="335384"/>
-                  </a:lnTo>
-                  <a:lnTo>
-                    <a:pt x="1504073" y="506535"/>
-                  </a:lnTo>
-                  <a:lnTo>
-                    <a:pt x="1575695" y="668383"/>
-                  </a:lnTo>
-                  <a:lnTo>
-                    <a:pt x="1647318" y="821431"/>
-                  </a:lnTo>
-                  <a:lnTo>
-                    <a:pt x="1718940" y="966160"/>
-                  </a:lnTo>
-                  <a:lnTo>
-                    <a:pt x="1790563" y="1103021"/>
-                  </a:lnTo>
-                  <a:lnTo>
-                    <a:pt x="1862185" y="1232442"/>
-                  </a:lnTo>
-                  <a:lnTo>
-                    <a:pt x="1933808" y="1354827"/>
-                  </a:lnTo>
-                  <a:lnTo>
-                    <a:pt x="2005430" y="1470559"/>
-                  </a:lnTo>
-                  <a:lnTo>
-                    <a:pt x="2077053" y="1580000"/>
-                  </a:lnTo>
-                  <a:lnTo>
-                    <a:pt x="2148675" y="1683492"/>
-                  </a:lnTo>
-                  <a:lnTo>
-                    <a:pt x="2220298" y="1781357"/>
-                  </a:lnTo>
-                  <a:lnTo>
-                    <a:pt x="2291920" y="1873902"/>
-                  </a:lnTo>
-                  <a:lnTo>
-                    <a:pt x="2363543" y="1961416"/>
-                  </a:lnTo>
-                  <a:lnTo>
-                    <a:pt x="2435165" y="2044173"/>
-                  </a:lnTo>
-                  <a:lnTo>
-                    <a:pt x="2506788" y="2122431"/>
-                  </a:lnTo>
-                  <a:lnTo>
-                    <a:pt x="2578410" y="2196435"/>
-                  </a:lnTo>
-                  <a:lnTo>
-                    <a:pt x="2650033" y="2266416"/>
-                  </a:lnTo>
-                  <a:lnTo>
-                    <a:pt x="2721655" y="2332592"/>
-                  </a:lnTo>
-                  <a:lnTo>
-                    <a:pt x="2793278" y="2395171"/>
-                  </a:lnTo>
-                  <a:lnTo>
-                    <a:pt x="2864901" y="2454348"/>
-                  </a:lnTo>
-                  <a:lnTo>
-                    <a:pt x="2936523" y="2510309"/>
-                  </a:lnTo>
-                  <a:lnTo>
-                    <a:pt x="3008146" y="2563227"/>
-                  </a:lnTo>
-                  <a:lnTo>
-                    <a:pt x="3079768" y="2613268"/>
-                  </a:lnTo>
-                  <a:lnTo>
-                    <a:pt x="3151391" y="2655815"/>
-                  </a:lnTo>
-                  <a:lnTo>
-                    <a:pt x="3223013" y="2666947"/>
+                    <a:pt x="1360827" y="151231"/>
+                  </a:lnTo>
+                  <a:lnTo>
+                    <a:pt x="1432450" y="332488"/>
+                  </a:lnTo>
+                  <a:lnTo>
+                    <a:pt x="1504073" y="503887"/>
+                  </a:lnTo>
+                  <a:lnTo>
+                    <a:pt x="1575695" y="665963"/>
+                  </a:lnTo>
+                  <a:lnTo>
+                    <a:pt x="1647318" y="819224"/>
+                  </a:lnTo>
+                  <a:lnTo>
+                    <a:pt x="1718940" y="964149"/>
+                  </a:lnTo>
+                  <a:lnTo>
+                    <a:pt x="1790563" y="1101191"/>
+                  </a:lnTo>
+                  <a:lnTo>
+                    <a:pt x="1862185" y="1230780"/>
+                  </a:lnTo>
+                  <a:lnTo>
+                    <a:pt x="1933808" y="1353320"/>
+                  </a:lnTo>
+                  <a:lnTo>
+                    <a:pt x="2005430" y="1469195"/>
+                  </a:lnTo>
+                  <a:lnTo>
+                    <a:pt x="2077053" y="1578768"/>
+                  </a:lnTo>
+                  <a:lnTo>
+                    <a:pt x="2148675" y="1682381"/>
+                  </a:lnTo>
+                  <a:lnTo>
+                    <a:pt x="2220298" y="1780358"/>
+                  </a:lnTo>
+                  <a:lnTo>
+                    <a:pt x="2291920" y="1873006"/>
+                  </a:lnTo>
+                  <a:lnTo>
+                    <a:pt x="2363543" y="1960615"/>
+                  </a:lnTo>
+                  <a:lnTo>
+                    <a:pt x="2435165" y="2043459"/>
+                  </a:lnTo>
+                  <a:lnTo>
+                    <a:pt x="2506788" y="2121797"/>
+                  </a:lnTo>
+                  <a:lnTo>
+                    <a:pt x="2578410" y="2195875"/>
+                  </a:lnTo>
+                  <a:lnTo>
+                    <a:pt x="2650033" y="2265923"/>
+                  </a:lnTo>
+                  <a:lnTo>
+                    <a:pt x="2721655" y="2332161"/>
+                  </a:lnTo>
+                  <a:lnTo>
+                    <a:pt x="2793278" y="2394796"/>
+                  </a:lnTo>
+                  <a:lnTo>
+                    <a:pt x="2864901" y="2454025"/>
+                  </a:lnTo>
+                  <a:lnTo>
+                    <a:pt x="2936523" y="2510032"/>
+                  </a:lnTo>
+                  <a:lnTo>
+                    <a:pt x="3008146" y="2562993"/>
+                  </a:lnTo>
+                  <a:lnTo>
+                    <a:pt x="3079768" y="2613073"/>
+                  </a:lnTo>
+                  <a:lnTo>
+                    <a:pt x="3151391" y="2655777"/>
+                  </a:lnTo>
+                  <a:lnTo>
+                    <a:pt x="3223013" y="2666929"/>
                   </a:lnTo>
                   <a:lnTo>
                     <a:pt x="3294636" y="2677930"/>
                   </a:lnTo>
                   <a:lnTo>
-                    <a:pt x="3366258" y="2688765"/>
-                  </a:lnTo>
-                  <a:lnTo>
-                    <a:pt x="3437881" y="2699455"/>
-                  </a:lnTo>
-                  <a:lnTo>
-                    <a:pt x="3509503" y="2710001"/>
-                  </a:lnTo>
-                  <a:lnTo>
-                    <a:pt x="3581126" y="2720405"/>
-                  </a:lnTo>
-                  <a:lnTo>
-                    <a:pt x="3652748" y="2730669"/>
-                  </a:lnTo>
-                  <a:lnTo>
-                    <a:pt x="3724371" y="2740795"/>
-                  </a:lnTo>
-                  <a:lnTo>
-                    <a:pt x="3795993" y="2750785"/>
-                  </a:lnTo>
-                  <a:lnTo>
-                    <a:pt x="3867616" y="2760641"/>
-                  </a:lnTo>
-                  <a:lnTo>
-                    <a:pt x="3939238" y="2770364"/>
-                  </a:lnTo>
-                  <a:lnTo>
-                    <a:pt x="4010861" y="2779956"/>
-                  </a:lnTo>
-                  <a:lnTo>
-                    <a:pt x="4082483" y="2789419"/>
-                  </a:lnTo>
-                  <a:lnTo>
-                    <a:pt x="4154106" y="2798756"/>
-                  </a:lnTo>
-                  <a:lnTo>
-                    <a:pt x="4225729" y="2807966"/>
-                  </a:lnTo>
-                  <a:lnTo>
-                    <a:pt x="4297351" y="2817053"/>
-                  </a:lnTo>
-                  <a:lnTo>
-                    <a:pt x="4368974" y="2826017"/>
-                  </a:lnTo>
-                  <a:lnTo>
-                    <a:pt x="4440596" y="2834861"/>
-                  </a:lnTo>
-                  <a:lnTo>
-                    <a:pt x="4512219" y="2843587"/>
-                  </a:lnTo>
-                  <a:lnTo>
-                    <a:pt x="4583841" y="2852194"/>
-                  </a:lnTo>
-                  <a:lnTo>
-                    <a:pt x="4655464" y="2860686"/>
-                  </a:lnTo>
-                  <a:lnTo>
-                    <a:pt x="4727086" y="2869064"/>
-                  </a:lnTo>
-                  <a:lnTo>
-                    <a:pt x="4798709" y="2877329"/>
-                  </a:lnTo>
-                  <a:lnTo>
-                    <a:pt x="4870331" y="2885484"/>
-                  </a:lnTo>
-                  <a:lnTo>
-                    <a:pt x="4941954" y="2893528"/>
-                  </a:lnTo>
-                  <a:lnTo>
-                    <a:pt x="5013576" y="2901464"/>
-                  </a:lnTo>
-                  <a:lnTo>
-                    <a:pt x="5085199" y="2909294"/>
-                  </a:lnTo>
-                  <a:lnTo>
-                    <a:pt x="5156821" y="2917018"/>
-                  </a:lnTo>
-                  <a:lnTo>
-                    <a:pt x="5228444" y="2924638"/>
-                  </a:lnTo>
-                  <a:lnTo>
-                    <a:pt x="5300066" y="2932156"/>
-                  </a:lnTo>
-                  <a:lnTo>
-                    <a:pt x="5371689" y="2939573"/>
-                  </a:lnTo>
-                  <a:lnTo>
-                    <a:pt x="5443311" y="2946890"/>
-                  </a:lnTo>
-                  <a:lnTo>
-                    <a:pt x="5514934" y="2954109"/>
-                  </a:lnTo>
-                  <a:lnTo>
-                    <a:pt x="5586557" y="2961231"/>
-                  </a:lnTo>
-                  <a:lnTo>
-                    <a:pt x="5658179" y="2968257"/>
-                  </a:lnTo>
-                  <a:lnTo>
-                    <a:pt x="5729802" y="2975188"/>
-                  </a:lnTo>
-                  <a:lnTo>
-                    <a:pt x="5801424" y="2982026"/>
-                  </a:lnTo>
-                  <a:lnTo>
-                    <a:pt x="5873047" y="2988773"/>
-                  </a:lnTo>
-                  <a:lnTo>
-                    <a:pt x="5944669" y="2995428"/>
-                  </a:lnTo>
-                  <a:lnTo>
-                    <a:pt x="6016292" y="3001994"/>
-                  </a:lnTo>
-                  <a:lnTo>
-                    <a:pt x="6087914" y="3008472"/>
-                  </a:lnTo>
-                  <a:lnTo>
-                    <a:pt x="6159537" y="3014863"/>
-                  </a:lnTo>
-                  <a:lnTo>
-                    <a:pt x="6231159" y="3021167"/>
-                  </a:lnTo>
-                  <a:lnTo>
-                    <a:pt x="6302782" y="3027387"/>
-                  </a:lnTo>
-                  <a:lnTo>
-                    <a:pt x="6374404" y="3033524"/>
-                  </a:lnTo>
-                  <a:lnTo>
-                    <a:pt x="6446027" y="3039578"/>
-                  </a:lnTo>
-                  <a:lnTo>
-                    <a:pt x="6517649" y="3045550"/>
-                  </a:lnTo>
-                  <a:lnTo>
-                    <a:pt x="6589272" y="3051442"/>
-                  </a:lnTo>
-                  <a:lnTo>
-                    <a:pt x="6660894" y="3057255"/>
-                  </a:lnTo>
-                  <a:lnTo>
-                    <a:pt x="6732517" y="3062990"/>
-                  </a:lnTo>
-                  <a:lnTo>
-                    <a:pt x="6804139" y="3068647"/>
-                  </a:lnTo>
-                  <a:lnTo>
-                    <a:pt x="6875762" y="3074229"/>
-                  </a:lnTo>
-                  <a:lnTo>
-                    <a:pt x="6947385" y="3079735"/>
-                  </a:lnTo>
-                  <a:lnTo>
-                    <a:pt x="7019007" y="3085168"/>
-                  </a:lnTo>
-                  <a:lnTo>
-                    <a:pt x="7090630" y="3090527"/>
-                  </a:lnTo>
-                  <a:lnTo>
-                    <a:pt x="7090630" y="3445696"/>
-                  </a:lnTo>
-                  <a:lnTo>
-                    <a:pt x="7019007" y="3443509"/>
-                  </a:lnTo>
-                  <a:lnTo>
-                    <a:pt x="6947385" y="3441196"/>
-                  </a:lnTo>
-                  <a:lnTo>
-                    <a:pt x="6875762" y="3438750"/>
-                  </a:lnTo>
-                  <a:lnTo>
-                    <a:pt x="6804139" y="3436163"/>
-                  </a:lnTo>
-                  <a:lnTo>
-                    <a:pt x="6732517" y="3433428"/>
-                  </a:lnTo>
-                  <a:lnTo>
-                    <a:pt x="6660894" y="3430535"/>
-                  </a:lnTo>
-                  <a:lnTo>
-                    <a:pt x="6589272" y="3427476"/>
-                  </a:lnTo>
-                  <a:lnTo>
-                    <a:pt x="6517649" y="3424241"/>
-                  </a:lnTo>
-                  <a:lnTo>
-                    <a:pt x="6446027" y="3420820"/>
-                  </a:lnTo>
-                  <a:lnTo>
-                    <a:pt x="6374404" y="3417203"/>
-                  </a:lnTo>
-                  <a:lnTo>
-                    <a:pt x="6302782" y="3413378"/>
-                  </a:lnTo>
-                  <a:lnTo>
-                    <a:pt x="6231159" y="3409332"/>
-                  </a:lnTo>
-                  <a:lnTo>
-                    <a:pt x="6159537" y="3405054"/>
-                  </a:lnTo>
-                  <a:lnTo>
-                    <a:pt x="6087914" y="3400531"/>
-                  </a:lnTo>
-                  <a:lnTo>
-                    <a:pt x="6016292" y="3395747"/>
-                  </a:lnTo>
-                  <a:lnTo>
-                    <a:pt x="5944669" y="3390688"/>
-                  </a:lnTo>
-                  <a:lnTo>
-                    <a:pt x="5873047" y="3385338"/>
-                  </a:lnTo>
-                  <a:lnTo>
-                    <a:pt x="5801424" y="3379681"/>
-                  </a:lnTo>
-                  <a:lnTo>
-                    <a:pt x="5729802" y="3373699"/>
-                  </a:lnTo>
-                  <a:lnTo>
-                    <a:pt x="5658179" y="3367372"/>
-                  </a:lnTo>
-                  <a:lnTo>
-                    <a:pt x="5586557" y="3360683"/>
-                  </a:lnTo>
-                  <a:lnTo>
-                    <a:pt x="5514934" y="3353608"/>
-                  </a:lnTo>
-                  <a:lnTo>
-                    <a:pt x="5443311" y="3346127"/>
-                  </a:lnTo>
-                  <a:lnTo>
-                    <a:pt x="5371689" y="3338215"/>
-                  </a:lnTo>
-                  <a:lnTo>
-                    <a:pt x="5300066" y="3329849"/>
-                  </a:lnTo>
-                  <a:lnTo>
-                    <a:pt x="5228444" y="3321002"/>
-                  </a:lnTo>
-                  <a:lnTo>
-                    <a:pt x="5156821" y="3311646"/>
-                  </a:lnTo>
-                  <a:lnTo>
-                    <a:pt x="5085199" y="3301753"/>
-                  </a:lnTo>
-                  <a:lnTo>
-                    <a:pt x="5013576" y="3291291"/>
-                  </a:lnTo>
-                  <a:lnTo>
-                    <a:pt x="4941954" y="3280227"/>
-                  </a:lnTo>
-                  <a:lnTo>
-                    <a:pt x="4870331" y="3268527"/>
-                  </a:lnTo>
-                  <a:lnTo>
-                    <a:pt x="4798709" y="3256155"/>
-                  </a:lnTo>
-                  <a:lnTo>
-                    <a:pt x="4727086" y="3243071"/>
-                  </a:lnTo>
-                  <a:lnTo>
-                    <a:pt x="4655464" y="3229235"/>
-                  </a:lnTo>
-                  <a:lnTo>
-                    <a:pt x="4583841" y="3214604"/>
-                  </a:lnTo>
-                  <a:lnTo>
-                    <a:pt x="4512219" y="3199132"/>
-                  </a:lnTo>
-                  <a:lnTo>
-                    <a:pt x="4440596" y="3182770"/>
-                  </a:lnTo>
-                  <a:lnTo>
-                    <a:pt x="4368974" y="3165468"/>
-                  </a:lnTo>
-                  <a:lnTo>
-                    <a:pt x="4297351" y="3147171"/>
-                  </a:lnTo>
-                  <a:lnTo>
-                    <a:pt x="4225729" y="3127823"/>
-                  </a:lnTo>
-                  <a:lnTo>
-                    <a:pt x="4154106" y="3107362"/>
-                  </a:lnTo>
-                  <a:lnTo>
-                    <a:pt x="4082483" y="3085724"/>
-                  </a:lnTo>
-                  <a:lnTo>
-                    <a:pt x="4010861" y="3062843"/>
-                  </a:lnTo>
-                  <a:lnTo>
-                    <a:pt x="3939238" y="3038647"/>
-                  </a:lnTo>
-                  <a:lnTo>
-                    <a:pt x="3867616" y="3013059"/>
-                  </a:lnTo>
-                  <a:lnTo>
-                    <a:pt x="3795993" y="2986001"/>
-                  </a:lnTo>
-                  <a:lnTo>
-                    <a:pt x="3724371" y="2957387"/>
-                  </a:lnTo>
-                  <a:lnTo>
-                    <a:pt x="3652748" y="2927128"/>
-                  </a:lnTo>
-                  <a:lnTo>
-                    <a:pt x="3581126" y="2895130"/>
-                  </a:lnTo>
-                  <a:lnTo>
-                    <a:pt x="3509503" y="2861292"/>
-                  </a:lnTo>
-                  <a:lnTo>
-                    <a:pt x="3437881" y="2825509"/>
-                  </a:lnTo>
-                  <a:lnTo>
-                    <a:pt x="3366258" y="2787669"/>
-                  </a:lnTo>
-                  <a:lnTo>
-                    <a:pt x="3294636" y="2747653"/>
-                  </a:lnTo>
-                  <a:lnTo>
-                    <a:pt x="3223013" y="2705337"/>
-                  </a:lnTo>
-                  <a:lnTo>
-                    <a:pt x="3151391" y="2660589"/>
-                  </a:lnTo>
-                  <a:lnTo>
-                    <a:pt x="3079768" y="2644530"/>
-                  </a:lnTo>
-                  <a:lnTo>
-                    <a:pt x="3008146" y="2633092"/>
-                  </a:lnTo>
-                  <a:lnTo>
-                    <a:pt x="2936523" y="2621498"/>
-                  </a:lnTo>
-                  <a:lnTo>
-                    <a:pt x="2864901" y="2609746"/>
-                  </a:lnTo>
-                  <a:lnTo>
-                    <a:pt x="2793278" y="2597834"/>
-                  </a:lnTo>
-                  <a:lnTo>
-                    <a:pt x="2721655" y="2585759"/>
-                  </a:lnTo>
-                  <a:lnTo>
-                    <a:pt x="2650033" y="2573520"/>
-                  </a:lnTo>
-                  <a:lnTo>
-                    <a:pt x="2578410" y="2561114"/>
-                  </a:lnTo>
-                  <a:lnTo>
-                    <a:pt x="2506788" y="2548539"/>
-                  </a:lnTo>
-                  <a:lnTo>
-                    <a:pt x="2435165" y="2535792"/>
-                  </a:lnTo>
-                  <a:lnTo>
-                    <a:pt x="2363543" y="2522872"/>
-                  </a:lnTo>
-                  <a:lnTo>
-                    <a:pt x="2291920" y="2509776"/>
-                  </a:lnTo>
-                  <a:lnTo>
-                    <a:pt x="2220298" y="2496501"/>
-                  </a:lnTo>
-                  <a:lnTo>
-                    <a:pt x="2148675" y="2483045"/>
-                  </a:lnTo>
-                  <a:lnTo>
-                    <a:pt x="2077053" y="2469406"/>
-                  </a:lnTo>
-                  <a:lnTo>
-                    <a:pt x="2005430" y="2455581"/>
-                  </a:lnTo>
-                  <a:lnTo>
-                    <a:pt x="1933808" y="2441568"/>
-                  </a:lnTo>
-                  <a:lnTo>
-                    <a:pt x="1862185" y="2427363"/>
-                  </a:lnTo>
-                  <a:lnTo>
-                    <a:pt x="1790563" y="2412965"/>
-                  </a:lnTo>
-                  <a:lnTo>
-                    <a:pt x="1718940" y="2398371"/>
-                  </a:lnTo>
-                  <a:lnTo>
-                    <a:pt x="1647318" y="2383578"/>
-                  </a:lnTo>
-                  <a:lnTo>
-                    <a:pt x="1575695" y="2368583"/>
-                  </a:lnTo>
-                  <a:lnTo>
-                    <a:pt x="1504073" y="2353383"/>
-                  </a:lnTo>
-                  <a:lnTo>
-                    <a:pt x="1432450" y="2337977"/>
-                  </a:lnTo>
-                  <a:lnTo>
-                    <a:pt x="1360827" y="2322361"/>
-                  </a:lnTo>
-                  <a:lnTo>
-                    <a:pt x="1289205" y="2306532"/>
-                  </a:lnTo>
-                  <a:lnTo>
-                    <a:pt x="1217582" y="2290487"/>
-                  </a:lnTo>
-                  <a:lnTo>
-                    <a:pt x="1145960" y="2274223"/>
-                  </a:lnTo>
-                  <a:lnTo>
-                    <a:pt x="1074337" y="2257738"/>
-                  </a:lnTo>
-                  <a:lnTo>
-                    <a:pt x="1002715" y="2241028"/>
-                  </a:lnTo>
-                  <a:lnTo>
-                    <a:pt x="931092" y="2224090"/>
-                  </a:lnTo>
-                  <a:lnTo>
-                    <a:pt x="859470" y="2206921"/>
-                  </a:lnTo>
-                  <a:lnTo>
-                    <a:pt x="787847" y="2189519"/>
-                  </a:lnTo>
-                  <a:lnTo>
-                    <a:pt x="716225" y="2171879"/>
-                  </a:lnTo>
-                  <a:lnTo>
-                    <a:pt x="644602" y="2153999"/>
-                  </a:lnTo>
-                  <a:lnTo>
-                    <a:pt x="572980" y="2135875"/>
-                  </a:lnTo>
-                  <a:lnTo>
-                    <a:pt x="501357" y="2117504"/>
-                  </a:lnTo>
-                  <a:lnTo>
-                    <a:pt x="429735" y="2098883"/>
-                  </a:lnTo>
-                  <a:lnTo>
-                    <a:pt x="358112" y="2080008"/>
-                  </a:lnTo>
-                  <a:lnTo>
-                    <a:pt x="286490" y="2060875"/>
-                  </a:lnTo>
-                  <a:lnTo>
-                    <a:pt x="214867" y="2041482"/>
-                  </a:lnTo>
-                  <a:lnTo>
-                    <a:pt x="143245" y="2021825"/>
-                  </a:lnTo>
-                  <a:lnTo>
-                    <a:pt x="71622" y="2001899"/>
-                  </a:lnTo>
-                  <a:lnTo>
-                    <a:pt x="0" y="1981702"/>
+                    <a:pt x="3366258" y="2688784"/>
+                  </a:lnTo>
+                  <a:lnTo>
+                    <a:pt x="3437881" y="2699491"/>
+                  </a:lnTo>
+                  <a:lnTo>
+                    <a:pt x="3509503" y="2710054"/>
+                  </a:lnTo>
+                  <a:lnTo>
+                    <a:pt x="3581126" y="2720474"/>
+                  </a:lnTo>
+                  <a:lnTo>
+                    <a:pt x="3652748" y="2730754"/>
+                  </a:lnTo>
+                  <a:lnTo>
+                    <a:pt x="3724371" y="2740896"/>
+                  </a:lnTo>
+                  <a:lnTo>
+                    <a:pt x="3795993" y="2750901"/>
+                  </a:lnTo>
+                  <a:lnTo>
+                    <a:pt x="3867616" y="2760772"/>
+                  </a:lnTo>
+                  <a:lnTo>
+                    <a:pt x="3939238" y="2770509"/>
+                  </a:lnTo>
+                  <a:lnTo>
+                    <a:pt x="4010861" y="2780116"/>
+                  </a:lnTo>
+                  <a:lnTo>
+                    <a:pt x="4082483" y="2789593"/>
+                  </a:lnTo>
+                  <a:lnTo>
+                    <a:pt x="4154106" y="2798942"/>
+                  </a:lnTo>
+                  <a:lnTo>
+                    <a:pt x="4225729" y="2808165"/>
+                  </a:lnTo>
+                  <a:lnTo>
+                    <a:pt x="4297351" y="2817264"/>
+                  </a:lnTo>
+                  <a:lnTo>
+                    <a:pt x="4368974" y="2826241"/>
+                  </a:lnTo>
+                  <a:lnTo>
+                    <a:pt x="4440596" y="2835097"/>
+                  </a:lnTo>
+                  <a:lnTo>
+                    <a:pt x="4512219" y="2843833"/>
+                  </a:lnTo>
+                  <a:lnTo>
+                    <a:pt x="4583841" y="2852452"/>
+                  </a:lnTo>
+                  <a:lnTo>
+                    <a:pt x="4655464" y="2860955"/>
+                  </a:lnTo>
+                  <a:lnTo>
+                    <a:pt x="4727086" y="2869343"/>
+                  </a:lnTo>
+                  <a:lnTo>
+                    <a:pt x="4798709" y="2877618"/>
+                  </a:lnTo>
+                  <a:lnTo>
+                    <a:pt x="4870331" y="2885782"/>
+                  </a:lnTo>
+                  <a:lnTo>
+                    <a:pt x="4941954" y="2893835"/>
+                  </a:lnTo>
+                  <a:lnTo>
+                    <a:pt x="5013576" y="2901781"/>
+                  </a:lnTo>
+                  <a:lnTo>
+                    <a:pt x="5085199" y="2909619"/>
+                  </a:lnTo>
+                  <a:lnTo>
+                    <a:pt x="5156821" y="2917352"/>
+                  </a:lnTo>
+                  <a:lnTo>
+                    <a:pt x="5228444" y="2924980"/>
+                  </a:lnTo>
+                  <a:lnTo>
+                    <a:pt x="5300066" y="2932506"/>
+                  </a:lnTo>
+                  <a:lnTo>
+                    <a:pt x="5371689" y="2939930"/>
+                  </a:lnTo>
+                  <a:lnTo>
+                    <a:pt x="5443311" y="2947255"/>
+                  </a:lnTo>
+                  <a:lnTo>
+                    <a:pt x="5514934" y="2954481"/>
+                  </a:lnTo>
+                  <a:lnTo>
+                    <a:pt x="5586557" y="2961609"/>
+                  </a:lnTo>
+                  <a:lnTo>
+                    <a:pt x="5658179" y="2968642"/>
+                  </a:lnTo>
+                  <a:lnTo>
+                    <a:pt x="5729802" y="2975579"/>
+                  </a:lnTo>
+                  <a:lnTo>
+                    <a:pt x="5801424" y="2982424"/>
+                  </a:lnTo>
+                  <a:lnTo>
+                    <a:pt x="5873047" y="2989176"/>
+                  </a:lnTo>
+                  <a:lnTo>
+                    <a:pt x="5944669" y="2995837"/>
+                  </a:lnTo>
+                  <a:lnTo>
+                    <a:pt x="6016292" y="3002409"/>
+                  </a:lnTo>
+                  <a:lnTo>
+                    <a:pt x="6087914" y="3008892"/>
+                  </a:lnTo>
+                  <a:lnTo>
+                    <a:pt x="6159537" y="3015287"/>
+                  </a:lnTo>
+                  <a:lnTo>
+                    <a:pt x="6231159" y="3021597"/>
+                  </a:lnTo>
+                  <a:lnTo>
+                    <a:pt x="6302782" y="3027821"/>
+                  </a:lnTo>
+                  <a:lnTo>
+                    <a:pt x="6374404" y="3033962"/>
+                  </a:lnTo>
+                  <a:lnTo>
+                    <a:pt x="6446027" y="3040020"/>
+                  </a:lnTo>
+                  <a:lnTo>
+                    <a:pt x="6517649" y="3045996"/>
+                  </a:lnTo>
+                  <a:lnTo>
+                    <a:pt x="6589272" y="3051892"/>
+                  </a:lnTo>
+                  <a:lnTo>
+                    <a:pt x="6660894" y="3057709"/>
+                  </a:lnTo>
+                  <a:lnTo>
+                    <a:pt x="6732517" y="3063447"/>
+                  </a:lnTo>
+                  <a:lnTo>
+                    <a:pt x="6804139" y="3069108"/>
+                  </a:lnTo>
+                  <a:lnTo>
+                    <a:pt x="6875762" y="3074692"/>
+                  </a:lnTo>
+                  <a:lnTo>
+                    <a:pt x="6947385" y="3080202"/>
+                  </a:lnTo>
+                  <a:lnTo>
+                    <a:pt x="7019007" y="3085637"/>
+                  </a:lnTo>
+                  <a:lnTo>
+                    <a:pt x="7090630" y="3090999"/>
+                  </a:lnTo>
+                  <a:lnTo>
+                    <a:pt x="7090630" y="3445752"/>
+                  </a:lnTo>
+                  <a:lnTo>
+                    <a:pt x="7019007" y="3443567"/>
+                  </a:lnTo>
+                  <a:lnTo>
+                    <a:pt x="6947385" y="3441256"/>
+                  </a:lnTo>
+                  <a:lnTo>
+                    <a:pt x="6875762" y="3438812"/>
+                  </a:lnTo>
+                  <a:lnTo>
+                    <a:pt x="6804139" y="3436227"/>
+                  </a:lnTo>
+                  <a:lnTo>
+                    <a:pt x="6732517" y="3433494"/>
+                  </a:lnTo>
+                  <a:lnTo>
+                    <a:pt x="6660894" y="3430604"/>
+                  </a:lnTo>
+                  <a:lnTo>
+                    <a:pt x="6589272" y="3427547"/>
+                  </a:lnTo>
+                  <a:lnTo>
+                    <a:pt x="6517649" y="3424314"/>
+                  </a:lnTo>
+                  <a:lnTo>
+                    <a:pt x="6446027" y="3420896"/>
+                  </a:lnTo>
+                  <a:lnTo>
+                    <a:pt x="6374404" y="3417281"/>
+                  </a:lnTo>
+                  <a:lnTo>
+                    <a:pt x="6302782" y="3413458"/>
+                  </a:lnTo>
+                  <a:lnTo>
+                    <a:pt x="6231159" y="3409415"/>
+                  </a:lnTo>
+                  <a:lnTo>
+                    <a:pt x="6159537" y="3405139"/>
+                  </a:lnTo>
+                  <a:lnTo>
+                    <a:pt x="6087914" y="3400618"/>
+                  </a:lnTo>
+                  <a:lnTo>
+                    <a:pt x="6016292" y="3395836"/>
+                  </a:lnTo>
+                  <a:lnTo>
+                    <a:pt x="5944669" y="3390780"/>
+                  </a:lnTo>
+                  <a:lnTo>
+                    <a:pt x="5873047" y="3385432"/>
+                  </a:lnTo>
+                  <a:lnTo>
+                    <a:pt x="5801424" y="3379778"/>
+                  </a:lnTo>
+                  <a:lnTo>
+                    <a:pt x="5729802" y="3373797"/>
+                  </a:lnTo>
+                  <a:lnTo>
+                    <a:pt x="5658179" y="3367473"/>
+                  </a:lnTo>
+                  <a:lnTo>
+                    <a:pt x="5586557" y="3360785"/>
+                  </a:lnTo>
+                  <a:lnTo>
+                    <a:pt x="5514934" y="3353713"/>
+                  </a:lnTo>
+                  <a:lnTo>
+                    <a:pt x="5443311" y="3346233"/>
+                  </a:lnTo>
+                  <a:lnTo>
+                    <a:pt x="5371689" y="3338324"/>
+                  </a:lnTo>
+                  <a:lnTo>
+                    <a:pt x="5300066" y="3329959"/>
+                  </a:lnTo>
+                  <a:lnTo>
+                    <a:pt x="5228444" y="3321113"/>
+                  </a:lnTo>
+                  <a:lnTo>
+                    <a:pt x="5156821" y="3311759"/>
+                  </a:lnTo>
+                  <a:lnTo>
+                    <a:pt x="5085199" y="3301866"/>
+                  </a:lnTo>
+                  <a:lnTo>
+                    <a:pt x="5013576" y="3291405"/>
+                  </a:lnTo>
+                  <a:lnTo>
+                    <a:pt x="4941954" y="3280341"/>
+                  </a:lnTo>
+                  <a:lnTo>
+                    <a:pt x="4870331" y="3268642"/>
+                  </a:lnTo>
+                  <a:lnTo>
+                    <a:pt x="4798709" y="3256269"/>
+                  </a:lnTo>
+                  <a:lnTo>
+                    <a:pt x="4727086" y="3243185"/>
+                  </a:lnTo>
+                  <a:lnTo>
+                    <a:pt x="4655464" y="3229348"/>
+                  </a:lnTo>
+                  <a:lnTo>
+                    <a:pt x="4583841" y="3214715"/>
+                  </a:lnTo>
+                  <a:lnTo>
+                    <a:pt x="4512219" y="3199241"/>
+                  </a:lnTo>
+                  <a:lnTo>
+                    <a:pt x="4440596" y="3182876"/>
+                  </a:lnTo>
+                  <a:lnTo>
+                    <a:pt x="4368974" y="3165570"/>
+                  </a:lnTo>
+                  <a:lnTo>
+                    <a:pt x="4297351" y="3147269"/>
+                  </a:lnTo>
+                  <a:lnTo>
+                    <a:pt x="4225729" y="3127915"/>
+                  </a:lnTo>
+                  <a:lnTo>
+                    <a:pt x="4154106" y="3107448"/>
+                  </a:lnTo>
+                  <a:lnTo>
+                    <a:pt x="4082483" y="3085804"/>
+                  </a:lnTo>
+                  <a:lnTo>
+                    <a:pt x="4010861" y="3062915"/>
+                  </a:lnTo>
+                  <a:lnTo>
+                    <a:pt x="3939238" y="3038709"/>
+                  </a:lnTo>
+                  <a:lnTo>
+                    <a:pt x="3867616" y="3013111"/>
+                  </a:lnTo>
+                  <a:lnTo>
+                    <a:pt x="3795993" y="2986040"/>
+                  </a:lnTo>
+                  <a:lnTo>
+                    <a:pt x="3724371" y="2957413"/>
+                  </a:lnTo>
+                  <a:lnTo>
+                    <a:pt x="3652748" y="2927138"/>
+                  </a:lnTo>
+                  <a:lnTo>
+                    <a:pt x="3581126" y="2895123"/>
+                  </a:lnTo>
+                  <a:lnTo>
+                    <a:pt x="3509503" y="2861266"/>
+                  </a:lnTo>
+                  <a:lnTo>
+                    <a:pt x="3437881" y="2825461"/>
+                  </a:lnTo>
+                  <a:lnTo>
+                    <a:pt x="3366258" y="2787597"/>
+                  </a:lnTo>
+                  <a:lnTo>
+                    <a:pt x="3294636" y="2747555"/>
+                  </a:lnTo>
+                  <a:lnTo>
+                    <a:pt x="3223013" y="2705210"/>
+                  </a:lnTo>
+                  <a:lnTo>
+                    <a:pt x="3151391" y="2660430"/>
+                  </a:lnTo>
+                  <a:lnTo>
+                    <a:pt x="3079768" y="2644474"/>
+                  </a:lnTo>
+                  <a:lnTo>
+                    <a:pt x="3008146" y="2633015"/>
+                  </a:lnTo>
+                  <a:lnTo>
+                    <a:pt x="2936523" y="2621401"/>
+                  </a:lnTo>
+                  <a:lnTo>
+                    <a:pt x="2864901" y="2609628"/>
+                  </a:lnTo>
+                  <a:lnTo>
+                    <a:pt x="2793278" y="2597694"/>
+                  </a:lnTo>
+                  <a:lnTo>
+                    <a:pt x="2721655" y="2585597"/>
+                  </a:lnTo>
+                  <a:lnTo>
+                    <a:pt x="2650033" y="2573335"/>
+                  </a:lnTo>
+                  <a:lnTo>
+                    <a:pt x="2578410" y="2560905"/>
+                  </a:lnTo>
+                  <a:lnTo>
+                    <a:pt x="2506788" y="2548306"/>
+                  </a:lnTo>
+                  <a:lnTo>
+                    <a:pt x="2435165" y="2535535"/>
+                  </a:lnTo>
+                  <a:lnTo>
+                    <a:pt x="2363543" y="2522590"/>
+                  </a:lnTo>
+                  <a:lnTo>
+                    <a:pt x="2291920" y="2509468"/>
+                  </a:lnTo>
+                  <a:lnTo>
+                    <a:pt x="2220298" y="2496166"/>
+                  </a:lnTo>
+                  <a:lnTo>
+                    <a:pt x="2148675" y="2482683"/>
+                  </a:lnTo>
+                  <a:lnTo>
+                    <a:pt x="2077053" y="2469016"/>
+                  </a:lnTo>
+                  <a:lnTo>
+                    <a:pt x="2005430" y="2455163"/>
+                  </a:lnTo>
+                  <a:lnTo>
+                    <a:pt x="1933808" y="2441120"/>
+                  </a:lnTo>
+                  <a:lnTo>
+                    <a:pt x="1862185" y="2426885"/>
+                  </a:lnTo>
+                  <a:lnTo>
+                    <a:pt x="1790563" y="2412457"/>
+                  </a:lnTo>
+                  <a:lnTo>
+                    <a:pt x="1718940" y="2397831"/>
+                  </a:lnTo>
+                  <a:lnTo>
+                    <a:pt x="1647318" y="2383005"/>
+                  </a:lnTo>
+                  <a:lnTo>
+                    <a:pt x="1575695" y="2367977"/>
+                  </a:lnTo>
+                  <a:lnTo>
+                    <a:pt x="1504073" y="2352744"/>
+                  </a:lnTo>
+                  <a:lnTo>
+                    <a:pt x="1432450" y="2337303"/>
+                  </a:lnTo>
+                  <a:lnTo>
+                    <a:pt x="1360827" y="2321652"/>
+                  </a:lnTo>
+                  <a:lnTo>
+                    <a:pt x="1289205" y="2305786"/>
+                  </a:lnTo>
+                  <a:lnTo>
+                    <a:pt x="1217582" y="2289704"/>
+                  </a:lnTo>
+                  <a:lnTo>
+                    <a:pt x="1145960" y="2273402"/>
+                  </a:lnTo>
+                  <a:lnTo>
+                    <a:pt x="1074337" y="2256878"/>
+                  </a:lnTo>
+                  <a:lnTo>
+                    <a:pt x="1002715" y="2240128"/>
+                  </a:lnTo>
+                  <a:lnTo>
+                    <a:pt x="931092" y="2223150"/>
+                  </a:lnTo>
+                  <a:lnTo>
+                    <a:pt x="859470" y="2205939"/>
+                  </a:lnTo>
+                  <a:lnTo>
+                    <a:pt x="787847" y="2188494"/>
+                  </a:lnTo>
+                  <a:lnTo>
+                    <a:pt x="716225" y="2170811"/>
+                  </a:lnTo>
+                  <a:lnTo>
+                    <a:pt x="644602" y="2152886"/>
+                  </a:lnTo>
+                  <a:lnTo>
+                    <a:pt x="572980" y="2134716"/>
+                  </a:lnTo>
+                  <a:lnTo>
+                    <a:pt x="501357" y="2116298"/>
+                  </a:lnTo>
+                  <a:lnTo>
+                    <a:pt x="429735" y="2097629"/>
+                  </a:lnTo>
+                  <a:lnTo>
+                    <a:pt x="358112" y="2078705"/>
+                  </a:lnTo>
+                  <a:lnTo>
+                    <a:pt x="286490" y="2059523"/>
+                  </a:lnTo>
+                  <a:lnTo>
+                    <a:pt x="214867" y="2040079"/>
+                  </a:lnTo>
+                  <a:lnTo>
+                    <a:pt x="143245" y="2020369"/>
+                  </a:lnTo>
+                  <a:lnTo>
+                    <a:pt x="71622" y="2000390"/>
+                  </a:lnTo>
+                  <a:lnTo>
+                    <a:pt x="0" y="1980139"/>
                   </a:lnTo>
                   <a:close/>
                 </a:path>
@@ -3966,258 +3966,258 @@
           </p:nvSpPr>
           <p:spPr>
             <a:xfrm>
-              <a:off x="2475100" y="2073503"/>
-              <a:ext cx="5787578" cy="3090527"/>
+              <a:off x="2476369" y="2073503"/>
+              <a:ext cx="5786309" cy="3090999"/>
             </a:xfrm>
             <a:custGeom>
               <a:avLst/>
               <a:pathLst>
-                <a:path w="5787578" h="3090527">
+                <a:path w="5786309" h="3090999">
                   <a:moveTo>
                     <a:pt x="0" y="0"/>
                   </a:moveTo>
                   <a:lnTo>
-                    <a:pt x="57776" y="154394"/>
-                  </a:lnTo>
-                  <a:lnTo>
-                    <a:pt x="129399" y="335384"/>
-                  </a:lnTo>
-                  <a:lnTo>
-                    <a:pt x="201021" y="506535"/>
-                  </a:lnTo>
-                  <a:lnTo>
-                    <a:pt x="272644" y="668383"/>
-                  </a:lnTo>
-                  <a:lnTo>
-                    <a:pt x="344266" y="821431"/>
-                  </a:lnTo>
-                  <a:lnTo>
-                    <a:pt x="415889" y="966160"/>
-                  </a:lnTo>
-                  <a:lnTo>
-                    <a:pt x="487511" y="1103021"/>
-                  </a:lnTo>
-                  <a:lnTo>
-                    <a:pt x="559134" y="1232442"/>
-                  </a:lnTo>
-                  <a:lnTo>
-                    <a:pt x="630756" y="1354827"/>
-                  </a:lnTo>
-                  <a:lnTo>
-                    <a:pt x="702379" y="1470559"/>
-                  </a:lnTo>
-                  <a:lnTo>
-                    <a:pt x="774001" y="1580000"/>
-                  </a:lnTo>
-                  <a:lnTo>
-                    <a:pt x="845624" y="1683492"/>
-                  </a:lnTo>
-                  <a:lnTo>
-                    <a:pt x="917246" y="1781357"/>
-                  </a:lnTo>
-                  <a:lnTo>
-                    <a:pt x="988869" y="1873902"/>
-                  </a:lnTo>
-                  <a:lnTo>
-                    <a:pt x="1060491" y="1961416"/>
-                  </a:lnTo>
-                  <a:lnTo>
-                    <a:pt x="1132114" y="2044173"/>
-                  </a:lnTo>
-                  <a:lnTo>
-                    <a:pt x="1203737" y="2122431"/>
-                  </a:lnTo>
-                  <a:lnTo>
-                    <a:pt x="1275359" y="2196435"/>
-                  </a:lnTo>
-                  <a:lnTo>
-                    <a:pt x="1346982" y="2266416"/>
-                  </a:lnTo>
-                  <a:lnTo>
-                    <a:pt x="1418604" y="2332592"/>
-                  </a:lnTo>
-                  <a:lnTo>
-                    <a:pt x="1490227" y="2395171"/>
-                  </a:lnTo>
-                  <a:lnTo>
-                    <a:pt x="1561849" y="2454348"/>
-                  </a:lnTo>
-                  <a:lnTo>
-                    <a:pt x="1633472" y="2510309"/>
-                  </a:lnTo>
-                  <a:lnTo>
-                    <a:pt x="1705094" y="2563227"/>
-                  </a:lnTo>
-                  <a:lnTo>
-                    <a:pt x="1776717" y="2613268"/>
-                  </a:lnTo>
-                  <a:lnTo>
-                    <a:pt x="1848339" y="2655815"/>
-                  </a:lnTo>
-                  <a:lnTo>
-                    <a:pt x="1919962" y="2666947"/>
-                  </a:lnTo>
-                  <a:lnTo>
-                    <a:pt x="1991584" y="2677930"/>
-                  </a:lnTo>
-                  <a:lnTo>
-                    <a:pt x="2063207" y="2688765"/>
-                  </a:lnTo>
-                  <a:lnTo>
-                    <a:pt x="2134829" y="2699455"/>
-                  </a:lnTo>
-                  <a:lnTo>
-                    <a:pt x="2206452" y="2710001"/>
-                  </a:lnTo>
-                  <a:lnTo>
-                    <a:pt x="2278074" y="2720405"/>
-                  </a:lnTo>
-                  <a:lnTo>
-                    <a:pt x="2349697" y="2730669"/>
-                  </a:lnTo>
-                  <a:lnTo>
-                    <a:pt x="2421319" y="2740795"/>
-                  </a:lnTo>
-                  <a:lnTo>
-                    <a:pt x="2492942" y="2750785"/>
-                  </a:lnTo>
-                  <a:lnTo>
-                    <a:pt x="2564565" y="2760641"/>
-                  </a:lnTo>
-                  <a:lnTo>
-                    <a:pt x="2636187" y="2770364"/>
-                  </a:lnTo>
-                  <a:lnTo>
-                    <a:pt x="2707810" y="2779956"/>
-                  </a:lnTo>
-                  <a:lnTo>
-                    <a:pt x="2779432" y="2789419"/>
-                  </a:lnTo>
-                  <a:lnTo>
-                    <a:pt x="2851055" y="2798756"/>
-                  </a:lnTo>
-                  <a:lnTo>
-                    <a:pt x="2922677" y="2807966"/>
-                  </a:lnTo>
-                  <a:lnTo>
-                    <a:pt x="2994300" y="2817053"/>
-                  </a:lnTo>
-                  <a:lnTo>
-                    <a:pt x="3065922" y="2826017"/>
-                  </a:lnTo>
-                  <a:lnTo>
-                    <a:pt x="3137545" y="2834861"/>
-                  </a:lnTo>
-                  <a:lnTo>
-                    <a:pt x="3209167" y="2843587"/>
-                  </a:lnTo>
-                  <a:lnTo>
-                    <a:pt x="3280790" y="2852194"/>
-                  </a:lnTo>
-                  <a:lnTo>
-                    <a:pt x="3352412" y="2860686"/>
-                  </a:lnTo>
-                  <a:lnTo>
-                    <a:pt x="3424035" y="2869064"/>
-                  </a:lnTo>
-                  <a:lnTo>
-                    <a:pt x="3495657" y="2877329"/>
-                  </a:lnTo>
-                  <a:lnTo>
-                    <a:pt x="3567280" y="2885484"/>
-                  </a:lnTo>
-                  <a:lnTo>
-                    <a:pt x="3638902" y="2893528"/>
-                  </a:lnTo>
-                  <a:lnTo>
-                    <a:pt x="3710525" y="2901464"/>
-                  </a:lnTo>
-                  <a:lnTo>
-                    <a:pt x="3782147" y="2909294"/>
-                  </a:lnTo>
-                  <a:lnTo>
-                    <a:pt x="3853770" y="2917018"/>
-                  </a:lnTo>
-                  <a:lnTo>
-                    <a:pt x="3925393" y="2924638"/>
-                  </a:lnTo>
-                  <a:lnTo>
-                    <a:pt x="3997015" y="2932156"/>
-                  </a:lnTo>
-                  <a:lnTo>
-                    <a:pt x="4068638" y="2939573"/>
-                  </a:lnTo>
-                  <a:lnTo>
-                    <a:pt x="4140260" y="2946890"/>
-                  </a:lnTo>
-                  <a:lnTo>
-                    <a:pt x="4211883" y="2954109"/>
-                  </a:lnTo>
-                  <a:lnTo>
-                    <a:pt x="4283505" y="2961231"/>
-                  </a:lnTo>
-                  <a:lnTo>
-                    <a:pt x="4355128" y="2968257"/>
-                  </a:lnTo>
-                  <a:lnTo>
-                    <a:pt x="4426750" y="2975188"/>
-                  </a:lnTo>
-                  <a:lnTo>
-                    <a:pt x="4498373" y="2982026"/>
-                  </a:lnTo>
-                  <a:lnTo>
-                    <a:pt x="4569995" y="2988773"/>
-                  </a:lnTo>
-                  <a:lnTo>
-                    <a:pt x="4641618" y="2995428"/>
-                  </a:lnTo>
-                  <a:lnTo>
-                    <a:pt x="4713240" y="3001994"/>
-                  </a:lnTo>
-                  <a:lnTo>
-                    <a:pt x="4784863" y="3008472"/>
-                  </a:lnTo>
-                  <a:lnTo>
-                    <a:pt x="4856485" y="3014863"/>
-                  </a:lnTo>
-                  <a:lnTo>
-                    <a:pt x="4928108" y="3021167"/>
-                  </a:lnTo>
-                  <a:lnTo>
-                    <a:pt x="4999730" y="3027387"/>
-                  </a:lnTo>
-                  <a:lnTo>
-                    <a:pt x="5071353" y="3033524"/>
-                  </a:lnTo>
-                  <a:lnTo>
-                    <a:pt x="5142975" y="3039578"/>
-                  </a:lnTo>
-                  <a:lnTo>
-                    <a:pt x="5214598" y="3045550"/>
-                  </a:lnTo>
-                  <a:lnTo>
-                    <a:pt x="5286221" y="3051442"/>
-                  </a:lnTo>
-                  <a:lnTo>
-                    <a:pt x="5357843" y="3057255"/>
-                  </a:lnTo>
-                  <a:lnTo>
-                    <a:pt x="5429466" y="3062990"/>
-                  </a:lnTo>
-                  <a:lnTo>
-                    <a:pt x="5501088" y="3068647"/>
-                  </a:lnTo>
-                  <a:lnTo>
-                    <a:pt x="5572711" y="3074229"/>
-                  </a:lnTo>
-                  <a:lnTo>
-                    <a:pt x="5644333" y="3079735"/>
-                  </a:lnTo>
-                  <a:lnTo>
-                    <a:pt x="5715956" y="3085168"/>
-                  </a:lnTo>
-                  <a:lnTo>
-                    <a:pt x="5787578" y="3090527"/>
+                    <a:pt x="56507" y="151231"/>
+                  </a:lnTo>
+                  <a:lnTo>
+                    <a:pt x="128130" y="332488"/>
+                  </a:lnTo>
+                  <a:lnTo>
+                    <a:pt x="199752" y="503887"/>
+                  </a:lnTo>
+                  <a:lnTo>
+                    <a:pt x="271375" y="665963"/>
+                  </a:lnTo>
+                  <a:lnTo>
+                    <a:pt x="342997" y="819224"/>
+                  </a:lnTo>
+                  <a:lnTo>
+                    <a:pt x="414620" y="964149"/>
+                  </a:lnTo>
+                  <a:lnTo>
+                    <a:pt x="486242" y="1101191"/>
+                  </a:lnTo>
+                  <a:lnTo>
+                    <a:pt x="557865" y="1230780"/>
+                  </a:lnTo>
+                  <a:lnTo>
+                    <a:pt x="629487" y="1353320"/>
+                  </a:lnTo>
+                  <a:lnTo>
+                    <a:pt x="701110" y="1469195"/>
+                  </a:lnTo>
+                  <a:lnTo>
+                    <a:pt x="772732" y="1578768"/>
+                  </a:lnTo>
+                  <a:lnTo>
+                    <a:pt x="844355" y="1682381"/>
+                  </a:lnTo>
+                  <a:lnTo>
+                    <a:pt x="915978" y="1780358"/>
+                  </a:lnTo>
+                  <a:lnTo>
+                    <a:pt x="987600" y="1873006"/>
+                  </a:lnTo>
+                  <a:lnTo>
+                    <a:pt x="1059223" y="1960615"/>
+                  </a:lnTo>
+                  <a:lnTo>
+                    <a:pt x="1130845" y="2043459"/>
+                  </a:lnTo>
+                  <a:lnTo>
+                    <a:pt x="1202468" y="2121797"/>
+                  </a:lnTo>
+                  <a:lnTo>
+                    <a:pt x="1274090" y="2195875"/>
+                  </a:lnTo>
+                  <a:lnTo>
+                    <a:pt x="1345713" y="2265923"/>
+                  </a:lnTo>
+                  <a:lnTo>
+                    <a:pt x="1417335" y="2332161"/>
+                  </a:lnTo>
+                  <a:lnTo>
+                    <a:pt x="1488958" y="2394796"/>
+                  </a:lnTo>
+                  <a:lnTo>
+                    <a:pt x="1560580" y="2454025"/>
+                  </a:lnTo>
+                  <a:lnTo>
+                    <a:pt x="1632203" y="2510032"/>
+                  </a:lnTo>
+                  <a:lnTo>
+                    <a:pt x="1703825" y="2562993"/>
+                  </a:lnTo>
+                  <a:lnTo>
+                    <a:pt x="1775448" y="2613073"/>
+                  </a:lnTo>
+                  <a:lnTo>
+                    <a:pt x="1847070" y="2655777"/>
+                  </a:lnTo>
+                  <a:lnTo>
+                    <a:pt x="1918693" y="2666929"/>
+                  </a:lnTo>
+                  <a:lnTo>
+                    <a:pt x="1990315" y="2677930"/>
+                  </a:lnTo>
+                  <a:lnTo>
+                    <a:pt x="2061938" y="2688784"/>
+                  </a:lnTo>
+                  <a:lnTo>
+                    <a:pt x="2133560" y="2699491"/>
+                  </a:lnTo>
+                  <a:lnTo>
+                    <a:pt x="2205183" y="2710054"/>
+                  </a:lnTo>
+                  <a:lnTo>
+                    <a:pt x="2276806" y="2720474"/>
+                  </a:lnTo>
+                  <a:lnTo>
+                    <a:pt x="2348428" y="2730754"/>
+                  </a:lnTo>
+                  <a:lnTo>
+                    <a:pt x="2420051" y="2740896"/>
+                  </a:lnTo>
+                  <a:lnTo>
+                    <a:pt x="2491673" y="2750901"/>
+                  </a:lnTo>
+                  <a:lnTo>
+                    <a:pt x="2563296" y="2760772"/>
+                  </a:lnTo>
+                  <a:lnTo>
+                    <a:pt x="2634918" y="2770509"/>
+                  </a:lnTo>
+                  <a:lnTo>
+                    <a:pt x="2706541" y="2780116"/>
+                  </a:lnTo>
+                  <a:lnTo>
+                    <a:pt x="2778163" y="2789593"/>
+                  </a:lnTo>
+                  <a:lnTo>
+                    <a:pt x="2849786" y="2798942"/>
+                  </a:lnTo>
+                  <a:lnTo>
+                    <a:pt x="2921408" y="2808165"/>
+                  </a:lnTo>
+                  <a:lnTo>
+                    <a:pt x="2993031" y="2817264"/>
+                  </a:lnTo>
+                  <a:lnTo>
+                    <a:pt x="3064653" y="2826241"/>
+                  </a:lnTo>
+                  <a:lnTo>
+                    <a:pt x="3136276" y="2835097"/>
+                  </a:lnTo>
+                  <a:lnTo>
+                    <a:pt x="3207898" y="2843833"/>
+                  </a:lnTo>
+                  <a:lnTo>
+                    <a:pt x="3279521" y="2852452"/>
+                  </a:lnTo>
+                  <a:lnTo>
+                    <a:pt x="3351143" y="2860955"/>
+                  </a:lnTo>
+                  <a:lnTo>
+                    <a:pt x="3422766" y="2869343"/>
+                  </a:lnTo>
+                  <a:lnTo>
+                    <a:pt x="3494388" y="2877618"/>
+                  </a:lnTo>
+                  <a:lnTo>
+                    <a:pt x="3566011" y="2885782"/>
+                  </a:lnTo>
+                  <a:lnTo>
+                    <a:pt x="3637634" y="2893835"/>
+                  </a:lnTo>
+                  <a:lnTo>
+                    <a:pt x="3709256" y="2901781"/>
+                  </a:lnTo>
+                  <a:lnTo>
+                    <a:pt x="3780879" y="2909619"/>
+                  </a:lnTo>
+                  <a:lnTo>
+                    <a:pt x="3852501" y="2917352"/>
+                  </a:lnTo>
+                  <a:lnTo>
+                    <a:pt x="3924124" y="2924980"/>
+                  </a:lnTo>
+                  <a:lnTo>
+                    <a:pt x="3995746" y="2932506"/>
+                  </a:lnTo>
+                  <a:lnTo>
+                    <a:pt x="4067369" y="2939930"/>
+                  </a:lnTo>
+                  <a:lnTo>
+                    <a:pt x="4138991" y="2947255"/>
+                  </a:lnTo>
+                  <a:lnTo>
+                    <a:pt x="4210614" y="2954481"/>
+                  </a:lnTo>
+                  <a:lnTo>
+                    <a:pt x="4282236" y="2961609"/>
+                  </a:lnTo>
+                  <a:lnTo>
+                    <a:pt x="4353859" y="2968642"/>
+                  </a:lnTo>
+                  <a:lnTo>
+                    <a:pt x="4425481" y="2975579"/>
+                  </a:lnTo>
+                  <a:lnTo>
+                    <a:pt x="4497104" y="2982424"/>
+                  </a:lnTo>
+                  <a:lnTo>
+                    <a:pt x="4568726" y="2989176"/>
+                  </a:lnTo>
+                  <a:lnTo>
+                    <a:pt x="4640349" y="2995837"/>
+                  </a:lnTo>
+                  <a:lnTo>
+                    <a:pt x="4711971" y="3002409"/>
+                  </a:lnTo>
+                  <a:lnTo>
+                    <a:pt x="4783594" y="3008892"/>
+                  </a:lnTo>
+                  <a:lnTo>
+                    <a:pt x="4855216" y="3015287"/>
+                  </a:lnTo>
+                  <a:lnTo>
+                    <a:pt x="4926839" y="3021597"/>
+                  </a:lnTo>
+                  <a:lnTo>
+                    <a:pt x="4998462" y="3027821"/>
+                  </a:lnTo>
+                  <a:lnTo>
+                    <a:pt x="5070084" y="3033962"/>
+                  </a:lnTo>
+                  <a:lnTo>
+                    <a:pt x="5141707" y="3040020"/>
+                  </a:lnTo>
+                  <a:lnTo>
+                    <a:pt x="5213329" y="3045996"/>
+                  </a:lnTo>
+                  <a:lnTo>
+                    <a:pt x="5284952" y="3051892"/>
+                  </a:lnTo>
+                  <a:lnTo>
+                    <a:pt x="5356574" y="3057709"/>
+                  </a:lnTo>
+                  <a:lnTo>
+                    <a:pt x="5428197" y="3063447"/>
+                  </a:lnTo>
+                  <a:lnTo>
+                    <a:pt x="5499819" y="3069108"/>
+                  </a:lnTo>
+                  <a:lnTo>
+                    <a:pt x="5571442" y="3074692"/>
+                  </a:lnTo>
+                  <a:lnTo>
+                    <a:pt x="5643064" y="3080202"/>
+                  </a:lnTo>
+                  <a:lnTo>
+                    <a:pt x="5714687" y="3085637"/>
+                  </a:lnTo>
+                  <a:lnTo>
+                    <a:pt x="5786309" y="3090999"/>
                   </a:lnTo>
                 </a:path>
               </a:pathLst>
@@ -4237,309 +4237,309 @@
           </p:nvSpPr>
           <p:spPr>
             <a:xfrm>
-              <a:off x="1172049" y="4055205"/>
-              <a:ext cx="7090630" cy="1463993"/>
+              <a:off x="1172049" y="4053642"/>
+              <a:ext cx="7090630" cy="1465613"/>
             </a:xfrm>
             <a:custGeom>
               <a:avLst/>
               <a:pathLst>
-                <a:path w="7090630" h="1463993">
+                <a:path w="7090630" h="1465613">
                   <a:moveTo>
-                    <a:pt x="7090630" y="1463993"/>
+                    <a:pt x="7090630" y="1465613"/>
                   </a:moveTo>
                   <a:lnTo>
-                    <a:pt x="7019007" y="1461806"/>
-                  </a:lnTo>
-                  <a:lnTo>
-                    <a:pt x="6947385" y="1459493"/>
-                  </a:lnTo>
-                  <a:lnTo>
-                    <a:pt x="6875762" y="1457047"/>
-                  </a:lnTo>
-                  <a:lnTo>
-                    <a:pt x="6804139" y="1454460"/>
-                  </a:lnTo>
-                  <a:lnTo>
-                    <a:pt x="6732517" y="1451725"/>
-                  </a:lnTo>
-                  <a:lnTo>
-                    <a:pt x="6660894" y="1448832"/>
-                  </a:lnTo>
-                  <a:lnTo>
-                    <a:pt x="6589272" y="1445773"/>
-                  </a:lnTo>
-                  <a:lnTo>
-                    <a:pt x="6517649" y="1442538"/>
-                  </a:lnTo>
-                  <a:lnTo>
-                    <a:pt x="6446027" y="1439117"/>
-                  </a:lnTo>
-                  <a:lnTo>
-                    <a:pt x="6374404" y="1435500"/>
-                  </a:lnTo>
-                  <a:lnTo>
-                    <a:pt x="6302782" y="1431675"/>
-                  </a:lnTo>
-                  <a:lnTo>
-                    <a:pt x="6231159" y="1427629"/>
-                  </a:lnTo>
-                  <a:lnTo>
-                    <a:pt x="6159537" y="1423352"/>
-                  </a:lnTo>
-                  <a:lnTo>
-                    <a:pt x="6087914" y="1418828"/>
-                  </a:lnTo>
-                  <a:lnTo>
-                    <a:pt x="6016292" y="1414044"/>
-                  </a:lnTo>
-                  <a:lnTo>
-                    <a:pt x="5944669" y="1408985"/>
-                  </a:lnTo>
-                  <a:lnTo>
-                    <a:pt x="5873047" y="1403635"/>
-                  </a:lnTo>
-                  <a:lnTo>
-                    <a:pt x="5801424" y="1397978"/>
-                  </a:lnTo>
-                  <a:lnTo>
-                    <a:pt x="5729802" y="1391996"/>
-                  </a:lnTo>
-                  <a:lnTo>
-                    <a:pt x="5658179" y="1385670"/>
-                  </a:lnTo>
-                  <a:lnTo>
-                    <a:pt x="5586557" y="1378980"/>
-                  </a:lnTo>
-                  <a:lnTo>
-                    <a:pt x="5514934" y="1371905"/>
-                  </a:lnTo>
-                  <a:lnTo>
-                    <a:pt x="5443311" y="1364424"/>
-                  </a:lnTo>
-                  <a:lnTo>
-                    <a:pt x="5371689" y="1356512"/>
-                  </a:lnTo>
-                  <a:lnTo>
-                    <a:pt x="5300066" y="1348146"/>
-                  </a:lnTo>
-                  <a:lnTo>
-                    <a:pt x="5228444" y="1339299"/>
-                  </a:lnTo>
-                  <a:lnTo>
-                    <a:pt x="5156821" y="1329943"/>
-                  </a:lnTo>
-                  <a:lnTo>
-                    <a:pt x="5085199" y="1320050"/>
-                  </a:lnTo>
-                  <a:lnTo>
-                    <a:pt x="5013576" y="1309588"/>
-                  </a:lnTo>
-                  <a:lnTo>
-                    <a:pt x="4941954" y="1298524"/>
-                  </a:lnTo>
-                  <a:lnTo>
-                    <a:pt x="4870331" y="1286824"/>
-                  </a:lnTo>
-                  <a:lnTo>
-                    <a:pt x="4798709" y="1274452"/>
-                  </a:lnTo>
-                  <a:lnTo>
-                    <a:pt x="4727086" y="1261368"/>
-                  </a:lnTo>
-                  <a:lnTo>
-                    <a:pt x="4655464" y="1247532"/>
-                  </a:lnTo>
-                  <a:lnTo>
-                    <a:pt x="4583841" y="1232901"/>
-                  </a:lnTo>
-                  <a:lnTo>
-                    <a:pt x="4512219" y="1217429"/>
-                  </a:lnTo>
-                  <a:lnTo>
-                    <a:pt x="4440596" y="1201068"/>
-                  </a:lnTo>
-                  <a:lnTo>
-                    <a:pt x="4368974" y="1183765"/>
-                  </a:lnTo>
-                  <a:lnTo>
-                    <a:pt x="4297351" y="1165468"/>
-                  </a:lnTo>
-                  <a:lnTo>
-                    <a:pt x="4225729" y="1146120"/>
-                  </a:lnTo>
-                  <a:lnTo>
-                    <a:pt x="4154106" y="1125659"/>
-                  </a:lnTo>
-                  <a:lnTo>
-                    <a:pt x="4082483" y="1104021"/>
-                  </a:lnTo>
-                  <a:lnTo>
-                    <a:pt x="4010861" y="1081140"/>
-                  </a:lnTo>
-                  <a:lnTo>
-                    <a:pt x="3939238" y="1056944"/>
-                  </a:lnTo>
-                  <a:lnTo>
-                    <a:pt x="3867616" y="1031356"/>
-                  </a:lnTo>
-                  <a:lnTo>
-                    <a:pt x="3795993" y="1004298"/>
-                  </a:lnTo>
-                  <a:lnTo>
-                    <a:pt x="3724371" y="975684"/>
-                  </a:lnTo>
-                  <a:lnTo>
-                    <a:pt x="3652748" y="945425"/>
-                  </a:lnTo>
-                  <a:lnTo>
-                    <a:pt x="3581126" y="913427"/>
-                  </a:lnTo>
-                  <a:lnTo>
-                    <a:pt x="3509503" y="879589"/>
-                  </a:lnTo>
-                  <a:lnTo>
-                    <a:pt x="3437881" y="843806"/>
-                  </a:lnTo>
-                  <a:lnTo>
-                    <a:pt x="3366258" y="805966"/>
-                  </a:lnTo>
-                  <a:lnTo>
-                    <a:pt x="3294636" y="765950"/>
-                  </a:lnTo>
-                  <a:lnTo>
-                    <a:pt x="3223013" y="723634"/>
-                  </a:lnTo>
-                  <a:lnTo>
-                    <a:pt x="3151391" y="678886"/>
-                  </a:lnTo>
-                  <a:lnTo>
-                    <a:pt x="3079768" y="662827"/>
-                  </a:lnTo>
-                  <a:lnTo>
-                    <a:pt x="3008146" y="651389"/>
-                  </a:lnTo>
-                  <a:lnTo>
-                    <a:pt x="2936523" y="639795"/>
-                  </a:lnTo>
-                  <a:lnTo>
-                    <a:pt x="2864901" y="628043"/>
-                  </a:lnTo>
-                  <a:lnTo>
-                    <a:pt x="2793278" y="616131"/>
-                  </a:lnTo>
-                  <a:lnTo>
-                    <a:pt x="2721655" y="604056"/>
-                  </a:lnTo>
-                  <a:lnTo>
-                    <a:pt x="2650033" y="591817"/>
-                  </a:lnTo>
-                  <a:lnTo>
-                    <a:pt x="2578410" y="579411"/>
-                  </a:lnTo>
-                  <a:lnTo>
-                    <a:pt x="2506788" y="566836"/>
-                  </a:lnTo>
-                  <a:lnTo>
-                    <a:pt x="2435165" y="554089"/>
-                  </a:lnTo>
-                  <a:lnTo>
-                    <a:pt x="2363543" y="541169"/>
-                  </a:lnTo>
-                  <a:lnTo>
-                    <a:pt x="2291920" y="528073"/>
-                  </a:lnTo>
-                  <a:lnTo>
-                    <a:pt x="2220298" y="514798"/>
-                  </a:lnTo>
-                  <a:lnTo>
-                    <a:pt x="2148675" y="501342"/>
-                  </a:lnTo>
-                  <a:lnTo>
-                    <a:pt x="2077053" y="487703"/>
-                  </a:lnTo>
-                  <a:lnTo>
-                    <a:pt x="2005430" y="473878"/>
-                  </a:lnTo>
-                  <a:lnTo>
-                    <a:pt x="1933808" y="459865"/>
-                  </a:lnTo>
-                  <a:lnTo>
-                    <a:pt x="1862185" y="445660"/>
-                  </a:lnTo>
-                  <a:lnTo>
-                    <a:pt x="1790563" y="431262"/>
-                  </a:lnTo>
-                  <a:lnTo>
-                    <a:pt x="1718940" y="416668"/>
-                  </a:lnTo>
-                  <a:lnTo>
-                    <a:pt x="1647318" y="401875"/>
-                  </a:lnTo>
-                  <a:lnTo>
-                    <a:pt x="1575695" y="386880"/>
-                  </a:lnTo>
-                  <a:lnTo>
-                    <a:pt x="1504073" y="371681"/>
-                  </a:lnTo>
-                  <a:lnTo>
-                    <a:pt x="1432450" y="356274"/>
-                  </a:lnTo>
-                  <a:lnTo>
-                    <a:pt x="1360827" y="340658"/>
-                  </a:lnTo>
-                  <a:lnTo>
-                    <a:pt x="1289205" y="324829"/>
-                  </a:lnTo>
-                  <a:lnTo>
-                    <a:pt x="1217582" y="308784"/>
-                  </a:lnTo>
-                  <a:lnTo>
-                    <a:pt x="1145960" y="292520"/>
-                  </a:lnTo>
-                  <a:lnTo>
-                    <a:pt x="1074337" y="276035"/>
-                  </a:lnTo>
-                  <a:lnTo>
-                    <a:pt x="1002715" y="259325"/>
-                  </a:lnTo>
-                  <a:lnTo>
-                    <a:pt x="931092" y="242387"/>
-                  </a:lnTo>
-                  <a:lnTo>
-                    <a:pt x="859470" y="225219"/>
-                  </a:lnTo>
-                  <a:lnTo>
-                    <a:pt x="787847" y="207816"/>
-                  </a:lnTo>
-                  <a:lnTo>
-                    <a:pt x="716225" y="190176"/>
-                  </a:lnTo>
-                  <a:lnTo>
-                    <a:pt x="644602" y="172296"/>
-                  </a:lnTo>
-                  <a:lnTo>
-                    <a:pt x="572980" y="154172"/>
-                  </a:lnTo>
-                  <a:lnTo>
-                    <a:pt x="501357" y="135801"/>
-                  </a:lnTo>
-                  <a:lnTo>
-                    <a:pt x="429735" y="117180"/>
-                  </a:lnTo>
-                  <a:lnTo>
-                    <a:pt x="358112" y="98305"/>
-                  </a:lnTo>
-                  <a:lnTo>
-                    <a:pt x="286490" y="79172"/>
-                  </a:lnTo>
-                  <a:lnTo>
-                    <a:pt x="214867" y="59779"/>
-                  </a:lnTo>
-                  <a:lnTo>
-                    <a:pt x="143245" y="40122"/>
-                  </a:lnTo>
-                  <a:lnTo>
-                    <a:pt x="71622" y="20196"/>
+                    <a:pt x="7019007" y="1463428"/>
+                  </a:lnTo>
+                  <a:lnTo>
+                    <a:pt x="6947385" y="1461117"/>
+                  </a:lnTo>
+                  <a:lnTo>
+                    <a:pt x="6875762" y="1458673"/>
+                  </a:lnTo>
+                  <a:lnTo>
+                    <a:pt x="6804139" y="1456088"/>
+                  </a:lnTo>
+                  <a:lnTo>
+                    <a:pt x="6732517" y="1453355"/>
+                  </a:lnTo>
+                  <a:lnTo>
+                    <a:pt x="6660894" y="1450464"/>
+                  </a:lnTo>
+                  <a:lnTo>
+                    <a:pt x="6589272" y="1447408"/>
+                  </a:lnTo>
+                  <a:lnTo>
+                    <a:pt x="6517649" y="1444175"/>
+                  </a:lnTo>
+                  <a:lnTo>
+                    <a:pt x="6446027" y="1440757"/>
+                  </a:lnTo>
+                  <a:lnTo>
+                    <a:pt x="6374404" y="1437141"/>
+                  </a:lnTo>
+                  <a:lnTo>
+                    <a:pt x="6302782" y="1433318"/>
+                  </a:lnTo>
+                  <a:lnTo>
+                    <a:pt x="6231159" y="1429275"/>
+                  </a:lnTo>
+                  <a:lnTo>
+                    <a:pt x="6159537" y="1425000"/>
+                  </a:lnTo>
+                  <a:lnTo>
+                    <a:pt x="6087914" y="1420479"/>
+                  </a:lnTo>
+                  <a:lnTo>
+                    <a:pt x="6016292" y="1415697"/>
+                  </a:lnTo>
+                  <a:lnTo>
+                    <a:pt x="5944669" y="1410641"/>
+                  </a:lnTo>
+                  <a:lnTo>
+                    <a:pt x="5873047" y="1405293"/>
+                  </a:lnTo>
+                  <a:lnTo>
+                    <a:pt x="5801424" y="1399638"/>
+                  </a:lnTo>
+                  <a:lnTo>
+                    <a:pt x="5729802" y="1393658"/>
+                  </a:lnTo>
+                  <a:lnTo>
+                    <a:pt x="5658179" y="1387334"/>
+                  </a:lnTo>
+                  <a:lnTo>
+                    <a:pt x="5586557" y="1380646"/>
+                  </a:lnTo>
+                  <a:lnTo>
+                    <a:pt x="5514934" y="1373573"/>
+                  </a:lnTo>
+                  <a:lnTo>
+                    <a:pt x="5443311" y="1366094"/>
+                  </a:lnTo>
+                  <a:lnTo>
+                    <a:pt x="5371689" y="1358184"/>
+                  </a:lnTo>
+                  <a:lnTo>
+                    <a:pt x="5300066" y="1349820"/>
+                  </a:lnTo>
+                  <a:lnTo>
+                    <a:pt x="5228444" y="1340974"/>
+                  </a:lnTo>
+                  <a:lnTo>
+                    <a:pt x="5156821" y="1331619"/>
+                  </a:lnTo>
+                  <a:lnTo>
+                    <a:pt x="5085199" y="1321727"/>
+                  </a:lnTo>
+                  <a:lnTo>
+                    <a:pt x="5013576" y="1311265"/>
+                  </a:lnTo>
+                  <a:lnTo>
+                    <a:pt x="4941954" y="1300202"/>
+                  </a:lnTo>
+                  <a:lnTo>
+                    <a:pt x="4870331" y="1288502"/>
+                  </a:lnTo>
+                  <a:lnTo>
+                    <a:pt x="4798709" y="1276130"/>
+                  </a:lnTo>
+                  <a:lnTo>
+                    <a:pt x="4727086" y="1263045"/>
+                  </a:lnTo>
+                  <a:lnTo>
+                    <a:pt x="4655464" y="1249209"/>
+                  </a:lnTo>
+                  <a:lnTo>
+                    <a:pt x="4583841" y="1234576"/>
+                  </a:lnTo>
+                  <a:lnTo>
+                    <a:pt x="4512219" y="1219101"/>
+                  </a:lnTo>
+                  <a:lnTo>
+                    <a:pt x="4440596" y="1202737"/>
+                  </a:lnTo>
+                  <a:lnTo>
+                    <a:pt x="4368974" y="1185431"/>
+                  </a:lnTo>
+                  <a:lnTo>
+                    <a:pt x="4297351" y="1167130"/>
+                  </a:lnTo>
+                  <a:lnTo>
+                    <a:pt x="4225729" y="1147776"/>
+                  </a:lnTo>
+                  <a:lnTo>
+                    <a:pt x="4154106" y="1127309"/>
+                  </a:lnTo>
+                  <a:lnTo>
+                    <a:pt x="4082483" y="1105665"/>
+                  </a:lnTo>
+                  <a:lnTo>
+                    <a:pt x="4010861" y="1082775"/>
+                  </a:lnTo>
+                  <a:lnTo>
+                    <a:pt x="3939238" y="1058569"/>
+                  </a:lnTo>
+                  <a:lnTo>
+                    <a:pt x="3867616" y="1032971"/>
+                  </a:lnTo>
+                  <a:lnTo>
+                    <a:pt x="3795993" y="1005901"/>
+                  </a:lnTo>
+                  <a:lnTo>
+                    <a:pt x="3724371" y="977273"/>
+                  </a:lnTo>
+                  <a:lnTo>
+                    <a:pt x="3652748" y="946999"/>
+                  </a:lnTo>
+                  <a:lnTo>
+                    <a:pt x="3581126" y="914983"/>
+                  </a:lnTo>
+                  <a:lnTo>
+                    <a:pt x="3509503" y="881126"/>
+                  </a:lnTo>
+                  <a:lnTo>
+                    <a:pt x="3437881" y="845322"/>
+                  </a:lnTo>
+                  <a:lnTo>
+                    <a:pt x="3366258" y="807458"/>
+                  </a:lnTo>
+                  <a:lnTo>
+                    <a:pt x="3294636" y="767416"/>
+                  </a:lnTo>
+                  <a:lnTo>
+                    <a:pt x="3223013" y="725071"/>
+                  </a:lnTo>
+                  <a:lnTo>
+                    <a:pt x="3151391" y="680290"/>
+                  </a:lnTo>
+                  <a:lnTo>
+                    <a:pt x="3079768" y="664334"/>
+                  </a:lnTo>
+                  <a:lnTo>
+                    <a:pt x="3008146" y="652876"/>
+                  </a:lnTo>
+                  <a:lnTo>
+                    <a:pt x="2936523" y="641261"/>
+                  </a:lnTo>
+                  <a:lnTo>
+                    <a:pt x="2864901" y="629488"/>
+                  </a:lnTo>
+                  <a:lnTo>
+                    <a:pt x="2793278" y="617554"/>
+                  </a:lnTo>
+                  <a:lnTo>
+                    <a:pt x="2721655" y="605458"/>
+                  </a:lnTo>
+                  <a:lnTo>
+                    <a:pt x="2650033" y="593196"/>
+                  </a:lnTo>
+                  <a:lnTo>
+                    <a:pt x="2578410" y="580766"/>
+                  </a:lnTo>
+                  <a:lnTo>
+                    <a:pt x="2506788" y="568167"/>
+                  </a:lnTo>
+                  <a:lnTo>
+                    <a:pt x="2435165" y="555396"/>
+                  </a:lnTo>
+                  <a:lnTo>
+                    <a:pt x="2363543" y="542450"/>
+                  </a:lnTo>
+                  <a:lnTo>
+                    <a:pt x="2291920" y="529328"/>
+                  </a:lnTo>
+                  <a:lnTo>
+                    <a:pt x="2220298" y="516027"/>
+                  </a:lnTo>
+                  <a:lnTo>
+                    <a:pt x="2148675" y="502544"/>
+                  </a:lnTo>
+                  <a:lnTo>
+                    <a:pt x="2077053" y="488877"/>
+                  </a:lnTo>
+                  <a:lnTo>
+                    <a:pt x="2005430" y="475023"/>
+                  </a:lnTo>
+                  <a:lnTo>
+                    <a:pt x="1933808" y="460981"/>
+                  </a:lnTo>
+                  <a:lnTo>
+                    <a:pt x="1862185" y="446746"/>
+                  </a:lnTo>
+                  <a:lnTo>
+                    <a:pt x="1790563" y="432317"/>
+                  </a:lnTo>
+                  <a:lnTo>
+                    <a:pt x="1718940" y="417691"/>
+                  </a:lnTo>
+                  <a:lnTo>
+                    <a:pt x="1647318" y="402866"/>
+                  </a:lnTo>
+                  <a:lnTo>
+                    <a:pt x="1575695" y="387838"/>
+                  </a:lnTo>
+                  <a:lnTo>
+                    <a:pt x="1504073" y="372605"/>
+                  </a:lnTo>
+                  <a:lnTo>
+                    <a:pt x="1432450" y="357164"/>
+                  </a:lnTo>
+                  <a:lnTo>
+                    <a:pt x="1360827" y="341512"/>
+                  </a:lnTo>
+                  <a:lnTo>
+                    <a:pt x="1289205" y="325647"/>
+                  </a:lnTo>
+                  <a:lnTo>
+                    <a:pt x="1217582" y="309565"/>
+                  </a:lnTo>
+                  <a:lnTo>
+                    <a:pt x="1145960" y="293263"/>
+                  </a:lnTo>
+                  <a:lnTo>
+                    <a:pt x="1074337" y="276739"/>
+                  </a:lnTo>
+                  <a:lnTo>
+                    <a:pt x="1002715" y="259989"/>
+                  </a:lnTo>
+                  <a:lnTo>
+                    <a:pt x="931092" y="243010"/>
+                  </a:lnTo>
+                  <a:lnTo>
+                    <a:pt x="859470" y="225800"/>
+                  </a:lnTo>
+                  <a:lnTo>
+                    <a:pt x="787847" y="208355"/>
+                  </a:lnTo>
+                  <a:lnTo>
+                    <a:pt x="716225" y="190671"/>
+                  </a:lnTo>
+                  <a:lnTo>
+                    <a:pt x="644602" y="172746"/>
+                  </a:lnTo>
+                  <a:lnTo>
+                    <a:pt x="572980" y="154577"/>
+                  </a:lnTo>
+                  <a:lnTo>
+                    <a:pt x="501357" y="136159"/>
+                  </a:lnTo>
+                  <a:lnTo>
+                    <a:pt x="429735" y="117490"/>
+                  </a:lnTo>
+                  <a:lnTo>
+                    <a:pt x="358112" y="98566"/>
+                  </a:lnTo>
+                  <a:lnTo>
+                    <a:pt x="286490" y="79384"/>
+                  </a:lnTo>
+                  <a:lnTo>
+                    <a:pt x="214867" y="59940"/>
+                  </a:lnTo>
+                  <a:lnTo>
+                    <a:pt x="143245" y="40230"/>
+                  </a:lnTo>
+                  <a:lnTo>
+                    <a:pt x="71622" y="20251"/>
                   </a:lnTo>
                   <a:lnTo>
                     <a:pt x="0" y="0"/>
@@ -4562,306 +4562,306 @@
           </p:nvSpPr>
           <p:spPr>
             <a:xfrm>
-              <a:off x="1353291" y="2073503"/>
-              <a:ext cx="6909388" cy="3361427"/>
+              <a:off x="1355793" y="2073503"/>
+              <a:ext cx="6906885" cy="3361590"/>
             </a:xfrm>
             <a:custGeom>
               <a:avLst/>
               <a:pathLst>
-                <a:path w="6909388" h="3361427">
+                <a:path w="6906885" h="3361590">
                   <a:moveTo>
                     <a:pt x="0" y="0"/>
                   </a:moveTo>
                   <a:lnTo>
-                    <a:pt x="33625" y="56835"/>
-                  </a:lnTo>
-                  <a:lnTo>
-                    <a:pt x="105248" y="173764"/>
-                  </a:lnTo>
-                  <a:lnTo>
-                    <a:pt x="176870" y="286703"/>
-                  </a:lnTo>
-                  <a:lnTo>
-                    <a:pt x="248493" y="395789"/>
-                  </a:lnTo>
-                  <a:lnTo>
-                    <a:pt x="320115" y="501152"/>
-                  </a:lnTo>
-                  <a:lnTo>
-                    <a:pt x="391738" y="602921"/>
-                  </a:lnTo>
-                  <a:lnTo>
-                    <a:pt x="463361" y="701217"/>
-                  </a:lnTo>
-                  <a:lnTo>
-                    <a:pt x="534983" y="796159"/>
-                  </a:lnTo>
-                  <a:lnTo>
-                    <a:pt x="606606" y="887861"/>
-                  </a:lnTo>
-                  <a:lnTo>
-                    <a:pt x="678228" y="976435"/>
-                  </a:lnTo>
-                  <a:lnTo>
-                    <a:pt x="749851" y="1061986"/>
-                  </a:lnTo>
-                  <a:lnTo>
-                    <a:pt x="821473" y="1144619"/>
-                  </a:lnTo>
-                  <a:lnTo>
-                    <a:pt x="893096" y="1224431"/>
-                  </a:lnTo>
-                  <a:lnTo>
-                    <a:pt x="964718" y="1301521"/>
-                  </a:lnTo>
-                  <a:lnTo>
-                    <a:pt x="1036341" y="1375980"/>
-                  </a:lnTo>
-                  <a:lnTo>
-                    <a:pt x="1107963" y="1447899"/>
-                  </a:lnTo>
-                  <a:lnTo>
-                    <a:pt x="1179586" y="1517363"/>
-                  </a:lnTo>
-                  <a:lnTo>
-                    <a:pt x="1251208" y="1584458"/>
-                  </a:lnTo>
-                  <a:lnTo>
-                    <a:pt x="1322831" y="1649263"/>
-                  </a:lnTo>
-                  <a:lnTo>
-                    <a:pt x="1394453" y="1711857"/>
-                  </a:lnTo>
-                  <a:lnTo>
-                    <a:pt x="1466076" y="1772315"/>
-                  </a:lnTo>
-                  <a:lnTo>
-                    <a:pt x="1537698" y="1830711"/>
-                  </a:lnTo>
-                  <a:lnTo>
-                    <a:pt x="1609321" y="1887114"/>
-                  </a:lnTo>
-                  <a:lnTo>
-                    <a:pt x="1680943" y="1941592"/>
-                  </a:lnTo>
-                  <a:lnTo>
-                    <a:pt x="1752566" y="1994211"/>
-                  </a:lnTo>
-                  <a:lnTo>
-                    <a:pt x="1824189" y="2045035"/>
-                  </a:lnTo>
-                  <a:lnTo>
-                    <a:pt x="1895811" y="2094125"/>
-                  </a:lnTo>
-                  <a:lnTo>
-                    <a:pt x="1967434" y="2141540"/>
-                  </a:lnTo>
-                  <a:lnTo>
-                    <a:pt x="2039056" y="2187337"/>
-                  </a:lnTo>
-                  <a:lnTo>
-                    <a:pt x="2110679" y="2231572"/>
-                  </a:lnTo>
-                  <a:lnTo>
-                    <a:pt x="2182301" y="2274297"/>
-                  </a:lnTo>
-                  <a:lnTo>
-                    <a:pt x="2253924" y="2315564"/>
-                  </a:lnTo>
-                  <a:lnTo>
-                    <a:pt x="2325546" y="2355424"/>
-                  </a:lnTo>
-                  <a:lnTo>
-                    <a:pt x="2397169" y="2393923"/>
-                  </a:lnTo>
-                  <a:lnTo>
-                    <a:pt x="2468791" y="2431108"/>
-                  </a:lnTo>
-                  <a:lnTo>
-                    <a:pt x="2540414" y="2467025"/>
-                  </a:lnTo>
-                  <a:lnTo>
-                    <a:pt x="2612036" y="2501717"/>
-                  </a:lnTo>
-                  <a:lnTo>
-                    <a:pt x="2683659" y="2535224"/>
-                  </a:lnTo>
-                  <a:lnTo>
-                    <a:pt x="2755281" y="2567589"/>
-                  </a:lnTo>
-                  <a:lnTo>
-                    <a:pt x="2826904" y="2598849"/>
-                  </a:lnTo>
-                  <a:lnTo>
-                    <a:pt x="2898526" y="2629042"/>
-                  </a:lnTo>
-                  <a:lnTo>
-                    <a:pt x="2970149" y="2658205"/>
-                  </a:lnTo>
-                  <a:lnTo>
-                    <a:pt x="3041771" y="2686373"/>
-                  </a:lnTo>
-                  <a:lnTo>
-                    <a:pt x="3113394" y="2713580"/>
-                  </a:lnTo>
-                  <a:lnTo>
-                    <a:pt x="3185017" y="2739859"/>
-                  </a:lnTo>
-                  <a:lnTo>
-                    <a:pt x="3256639" y="2765241"/>
-                  </a:lnTo>
-                  <a:lnTo>
-                    <a:pt x="3328262" y="2789757"/>
-                  </a:lnTo>
-                  <a:lnTo>
-                    <a:pt x="3399884" y="2813436"/>
-                  </a:lnTo>
-                  <a:lnTo>
-                    <a:pt x="3471507" y="2836308"/>
-                  </a:lnTo>
-                  <a:lnTo>
-                    <a:pt x="3543129" y="2858399"/>
-                  </a:lnTo>
-                  <a:lnTo>
-                    <a:pt x="3614752" y="2879736"/>
-                  </a:lnTo>
-                  <a:lnTo>
-                    <a:pt x="3686374" y="2900345"/>
-                  </a:lnTo>
-                  <a:lnTo>
-                    <a:pt x="3757997" y="2920252"/>
-                  </a:lnTo>
-                  <a:lnTo>
-                    <a:pt x="3829619" y="2939478"/>
-                  </a:lnTo>
-                  <a:lnTo>
-                    <a:pt x="3901242" y="2958049"/>
-                  </a:lnTo>
-                  <a:lnTo>
-                    <a:pt x="3972864" y="2975986"/>
-                  </a:lnTo>
-                  <a:lnTo>
-                    <a:pt x="4044487" y="2993312"/>
-                  </a:lnTo>
-                  <a:lnTo>
-                    <a:pt x="4116109" y="3010046"/>
-                  </a:lnTo>
-                  <a:lnTo>
-                    <a:pt x="4187732" y="3026209"/>
-                  </a:lnTo>
-                  <a:lnTo>
-                    <a:pt x="4259354" y="3041820"/>
-                  </a:lnTo>
-                  <a:lnTo>
-                    <a:pt x="4330977" y="3056899"/>
-                  </a:lnTo>
-                  <a:lnTo>
-                    <a:pt x="4402599" y="3071463"/>
-                  </a:lnTo>
-                  <a:lnTo>
-                    <a:pt x="4474222" y="3085531"/>
-                  </a:lnTo>
-                  <a:lnTo>
-                    <a:pt x="4545845" y="3099118"/>
-                  </a:lnTo>
-                  <a:lnTo>
-                    <a:pt x="4617467" y="3112242"/>
-                  </a:lnTo>
-                  <a:lnTo>
-                    <a:pt x="4689090" y="3124918"/>
-                  </a:lnTo>
-                  <a:lnTo>
-                    <a:pt x="4760712" y="3137162"/>
-                  </a:lnTo>
-                  <a:lnTo>
-                    <a:pt x="4832335" y="3148987"/>
-                  </a:lnTo>
-                  <a:lnTo>
-                    <a:pt x="4903957" y="3160410"/>
-                  </a:lnTo>
-                  <a:lnTo>
-                    <a:pt x="4975580" y="3171442"/>
-                  </a:lnTo>
-                  <a:lnTo>
-                    <a:pt x="5047202" y="3182098"/>
-                  </a:lnTo>
-                  <a:lnTo>
-                    <a:pt x="5118825" y="3192391"/>
-                  </a:lnTo>
-                  <a:lnTo>
-                    <a:pt x="5190447" y="3202332"/>
-                  </a:lnTo>
-                  <a:lnTo>
-                    <a:pt x="5262070" y="3211934"/>
-                  </a:lnTo>
-                  <a:lnTo>
-                    <a:pt x="5333692" y="3221208"/>
-                  </a:lnTo>
-                  <a:lnTo>
-                    <a:pt x="5405315" y="3230166"/>
-                  </a:lnTo>
-                  <a:lnTo>
-                    <a:pt x="5476937" y="3238819"/>
-                  </a:lnTo>
-                  <a:lnTo>
-                    <a:pt x="5548560" y="3247176"/>
-                  </a:lnTo>
-                  <a:lnTo>
-                    <a:pt x="5620182" y="3255248"/>
-                  </a:lnTo>
-                  <a:lnTo>
-                    <a:pt x="5691805" y="3263044"/>
-                  </a:lnTo>
-                  <a:lnTo>
-                    <a:pt x="5763427" y="3270575"/>
-                  </a:lnTo>
-                  <a:lnTo>
-                    <a:pt x="5835050" y="3277848"/>
-                  </a:lnTo>
-                  <a:lnTo>
-                    <a:pt x="5906672" y="3284874"/>
-                  </a:lnTo>
-                  <a:lnTo>
-                    <a:pt x="5978295" y="3291660"/>
-                  </a:lnTo>
-                  <a:lnTo>
-                    <a:pt x="6049918" y="3298214"/>
-                  </a:lnTo>
-                  <a:lnTo>
-                    <a:pt x="6121540" y="3304544"/>
-                  </a:lnTo>
-                  <a:lnTo>
-                    <a:pt x="6193163" y="3310659"/>
-                  </a:lnTo>
-                  <a:lnTo>
-                    <a:pt x="6264785" y="3316565"/>
-                  </a:lnTo>
-                  <a:lnTo>
-                    <a:pt x="6336408" y="3322269"/>
-                  </a:lnTo>
-                  <a:lnTo>
-                    <a:pt x="6408030" y="3327779"/>
-                  </a:lnTo>
-                  <a:lnTo>
-                    <a:pt x="6479653" y="3333100"/>
-                  </a:lnTo>
-                  <a:lnTo>
-                    <a:pt x="6551275" y="3338241"/>
-                  </a:lnTo>
-                  <a:lnTo>
-                    <a:pt x="6622898" y="3343205"/>
-                  </a:lnTo>
-                  <a:lnTo>
-                    <a:pt x="6694520" y="3348001"/>
-                  </a:lnTo>
-                  <a:lnTo>
-                    <a:pt x="6766143" y="3352633"/>
-                  </a:lnTo>
-                  <a:lnTo>
-                    <a:pt x="6837765" y="3357106"/>
-                  </a:lnTo>
-                  <a:lnTo>
-                    <a:pt x="6909388" y="3361427"/>
+                    <a:pt x="31123" y="52710"/>
+                  </a:lnTo>
+                  <a:lnTo>
+                    <a:pt x="102745" y="169867"/>
+                  </a:lnTo>
+                  <a:lnTo>
+                    <a:pt x="174368" y="283024"/>
+                  </a:lnTo>
+                  <a:lnTo>
+                    <a:pt x="245991" y="392317"/>
+                  </a:lnTo>
+                  <a:lnTo>
+                    <a:pt x="317613" y="497878"/>
+                  </a:lnTo>
+                  <a:lnTo>
+                    <a:pt x="389236" y="599834"/>
+                  </a:lnTo>
+                  <a:lnTo>
+                    <a:pt x="460858" y="698309"/>
+                  </a:lnTo>
+                  <a:lnTo>
+                    <a:pt x="532481" y="793421"/>
+                  </a:lnTo>
+                  <a:lnTo>
+                    <a:pt x="604103" y="885286"/>
+                  </a:lnTo>
+                  <a:lnTo>
+                    <a:pt x="675726" y="974014"/>
+                  </a:lnTo>
+                  <a:lnTo>
+                    <a:pt x="747348" y="1059712"/>
+                  </a:lnTo>
+                  <a:lnTo>
+                    <a:pt x="818971" y="1142484"/>
+                  </a:lnTo>
+                  <a:lnTo>
+                    <a:pt x="890593" y="1222429"/>
+                  </a:lnTo>
+                  <a:lnTo>
+                    <a:pt x="962216" y="1299645"/>
+                  </a:lnTo>
+                  <a:lnTo>
+                    <a:pt x="1033838" y="1374224"/>
+                  </a:lnTo>
+                  <a:lnTo>
+                    <a:pt x="1105461" y="1446256"/>
+                  </a:lnTo>
+                  <a:lnTo>
+                    <a:pt x="1177083" y="1515829"/>
+                  </a:lnTo>
+                  <a:lnTo>
+                    <a:pt x="1248706" y="1583026"/>
+                  </a:lnTo>
+                  <a:lnTo>
+                    <a:pt x="1320328" y="1647929"/>
+                  </a:lnTo>
+                  <a:lnTo>
+                    <a:pt x="1391951" y="1710615"/>
+                  </a:lnTo>
+                  <a:lnTo>
+                    <a:pt x="1463573" y="1771161"/>
+                  </a:lnTo>
+                  <a:lnTo>
+                    <a:pt x="1535196" y="1829639"/>
+                  </a:lnTo>
+                  <a:lnTo>
+                    <a:pt x="1606819" y="1886121"/>
+                  </a:lnTo>
+                  <a:lnTo>
+                    <a:pt x="1678441" y="1940674"/>
+                  </a:lnTo>
+                  <a:lnTo>
+                    <a:pt x="1750064" y="1993364"/>
+                  </a:lnTo>
+                  <a:lnTo>
+                    <a:pt x="1821686" y="2044255"/>
+                  </a:lnTo>
+                  <a:lnTo>
+                    <a:pt x="1893309" y="2093409"/>
+                  </a:lnTo>
+                  <a:lnTo>
+                    <a:pt x="1964931" y="2140883"/>
+                  </a:lnTo>
+                  <a:lnTo>
+                    <a:pt x="2036554" y="2186737"/>
+                  </a:lnTo>
+                  <a:lnTo>
+                    <a:pt x="2108176" y="2231025"/>
+                  </a:lnTo>
+                  <a:lnTo>
+                    <a:pt x="2179799" y="2273801"/>
+                  </a:lnTo>
+                  <a:lnTo>
+                    <a:pt x="2251421" y="2315116"/>
+                  </a:lnTo>
+                  <a:lnTo>
+                    <a:pt x="2323044" y="2355021"/>
+                  </a:lnTo>
+                  <a:lnTo>
+                    <a:pt x="2394666" y="2393563"/>
+                  </a:lnTo>
+                  <a:lnTo>
+                    <a:pt x="2466289" y="2430788"/>
+                  </a:lnTo>
+                  <a:lnTo>
+                    <a:pt x="2537911" y="2466743"/>
+                  </a:lnTo>
+                  <a:lnTo>
+                    <a:pt x="2609534" y="2501470"/>
+                  </a:lnTo>
+                  <a:lnTo>
+                    <a:pt x="2681156" y="2535011"/>
+                  </a:lnTo>
+                  <a:lnTo>
+                    <a:pt x="2752779" y="2567407"/>
+                  </a:lnTo>
+                  <a:lnTo>
+                    <a:pt x="2824401" y="2598696"/>
+                  </a:lnTo>
+                  <a:lnTo>
+                    <a:pt x="2896024" y="2628918"/>
+                  </a:lnTo>
+                  <a:lnTo>
+                    <a:pt x="2967647" y="2658107"/>
+                  </a:lnTo>
+                  <a:lnTo>
+                    <a:pt x="3039269" y="2686299"/>
+                  </a:lnTo>
+                  <a:lnTo>
+                    <a:pt x="3110892" y="2713529"/>
+                  </a:lnTo>
+                  <a:lnTo>
+                    <a:pt x="3182514" y="2739829"/>
+                  </a:lnTo>
+                  <a:lnTo>
+                    <a:pt x="3254137" y="2765231"/>
+                  </a:lnTo>
+                  <a:lnTo>
+                    <a:pt x="3325759" y="2789766"/>
+                  </a:lnTo>
+                  <a:lnTo>
+                    <a:pt x="3397382" y="2813463"/>
+                  </a:lnTo>
+                  <a:lnTo>
+                    <a:pt x="3469004" y="2836350"/>
+                  </a:lnTo>
+                  <a:lnTo>
+                    <a:pt x="3540627" y="2858457"/>
+                  </a:lnTo>
+                  <a:lnTo>
+                    <a:pt x="3612249" y="2879808"/>
+                  </a:lnTo>
+                  <a:lnTo>
+                    <a:pt x="3683872" y="2900430"/>
+                  </a:lnTo>
+                  <a:lnTo>
+                    <a:pt x="3755494" y="2920348"/>
+                  </a:lnTo>
+                  <a:lnTo>
+                    <a:pt x="3827117" y="2939586"/>
+                  </a:lnTo>
+                  <a:lnTo>
+                    <a:pt x="3898739" y="2958167"/>
+                  </a:lnTo>
+                  <a:lnTo>
+                    <a:pt x="3970362" y="2976114"/>
+                  </a:lnTo>
+                  <a:lnTo>
+                    <a:pt x="4041984" y="2993448"/>
+                  </a:lnTo>
+                  <a:lnTo>
+                    <a:pt x="4113607" y="3010190"/>
+                  </a:lnTo>
+                  <a:lnTo>
+                    <a:pt x="4185229" y="3026360"/>
+                  </a:lnTo>
+                  <a:lnTo>
+                    <a:pt x="4256852" y="3041978"/>
+                  </a:lnTo>
+                  <a:lnTo>
+                    <a:pt x="4328475" y="3057063"/>
+                  </a:lnTo>
+                  <a:lnTo>
+                    <a:pt x="4400097" y="3071632"/>
+                  </a:lnTo>
+                  <a:lnTo>
+                    <a:pt x="4471720" y="3085705"/>
+                  </a:lnTo>
+                  <a:lnTo>
+                    <a:pt x="4543342" y="3099296"/>
+                  </a:lnTo>
+                  <a:lnTo>
+                    <a:pt x="4614965" y="3112424"/>
+                  </a:lnTo>
+                  <a:lnTo>
+                    <a:pt x="4686587" y="3125103"/>
+                  </a:lnTo>
+                  <a:lnTo>
+                    <a:pt x="4758210" y="3137349"/>
+                  </a:lnTo>
+                  <a:lnTo>
+                    <a:pt x="4829832" y="3149178"/>
+                  </a:lnTo>
+                  <a:lnTo>
+                    <a:pt x="4901455" y="3160602"/>
+                  </a:lnTo>
+                  <a:lnTo>
+                    <a:pt x="4973077" y="3171636"/>
+                  </a:lnTo>
+                  <a:lnTo>
+                    <a:pt x="5044700" y="3182293"/>
+                  </a:lnTo>
+                  <a:lnTo>
+                    <a:pt x="5116322" y="3192587"/>
+                  </a:lnTo>
+                  <a:lnTo>
+                    <a:pt x="5187945" y="3202529"/>
+                  </a:lnTo>
+                  <a:lnTo>
+                    <a:pt x="5259567" y="3212132"/>
+                  </a:lnTo>
+                  <a:lnTo>
+                    <a:pt x="5331190" y="3221406"/>
+                  </a:lnTo>
+                  <a:lnTo>
+                    <a:pt x="5402812" y="3230364"/>
+                  </a:lnTo>
+                  <a:lnTo>
+                    <a:pt x="5474435" y="3239016"/>
+                  </a:lnTo>
+                  <a:lnTo>
+                    <a:pt x="5546057" y="3247373"/>
+                  </a:lnTo>
+                  <a:lnTo>
+                    <a:pt x="5617680" y="3255444"/>
+                  </a:lnTo>
+                  <a:lnTo>
+                    <a:pt x="5689303" y="3263240"/>
+                  </a:lnTo>
+                  <a:lnTo>
+                    <a:pt x="5760925" y="3270769"/>
+                  </a:lnTo>
+                  <a:lnTo>
+                    <a:pt x="5832548" y="3278042"/>
+                  </a:lnTo>
+                  <a:lnTo>
+                    <a:pt x="5904170" y="3285066"/>
+                  </a:lnTo>
+                  <a:lnTo>
+                    <a:pt x="5975793" y="3291850"/>
+                  </a:lnTo>
+                  <a:lnTo>
+                    <a:pt x="6047415" y="3298402"/>
+                  </a:lnTo>
+                  <a:lnTo>
+                    <a:pt x="6119038" y="3304731"/>
+                  </a:lnTo>
+                  <a:lnTo>
+                    <a:pt x="6190660" y="3310844"/>
+                  </a:lnTo>
+                  <a:lnTo>
+                    <a:pt x="6262283" y="3316748"/>
+                  </a:lnTo>
+                  <a:lnTo>
+                    <a:pt x="6333905" y="3322450"/>
+                  </a:lnTo>
+                  <a:lnTo>
+                    <a:pt x="6405528" y="3327958"/>
+                  </a:lnTo>
+                  <a:lnTo>
+                    <a:pt x="6477150" y="3333278"/>
+                  </a:lnTo>
+                  <a:lnTo>
+                    <a:pt x="6548773" y="3338416"/>
+                  </a:lnTo>
+                  <a:lnTo>
+                    <a:pt x="6620395" y="3343378"/>
+                  </a:lnTo>
+                  <a:lnTo>
+                    <a:pt x="6692018" y="3348171"/>
+                  </a:lnTo>
+                  <a:lnTo>
+                    <a:pt x="6763640" y="3352801"/>
+                  </a:lnTo>
+                  <a:lnTo>
+                    <a:pt x="6835263" y="3357272"/>
+                  </a:lnTo>
+                  <a:lnTo>
+                    <a:pt x="6906885" y="3361590"/>
                   </a:lnTo>
                 </a:path>
               </a:pathLst>
@@ -4933,7 +4933,7 @@
           </p:nvSpPr>
           <p:spPr>
             <a:xfrm>
-              <a:off x="4313661" y="2073503"/>
+              <a:off x="4313914" y="2073503"/>
               <a:ext cx="0" cy="3649639"/>
             </a:xfrm>
             <a:custGeom>
@@ -5206,7 +5206,7 @@
           </p:nvSpPr>
           <p:spPr>
             <a:xfrm>
-              <a:off x="1343342" y="5785772"/>
+              <a:off x="1344940" y="5785772"/>
               <a:ext cx="161574" cy="80101"/>
             </a:xfrm>
             <a:prstGeom prst="rect">
@@ -5252,7 +5252,7 @@
           </p:nvSpPr>
           <p:spPr>
             <a:xfrm>
-              <a:off x="2280620" y="5785772"/>
+              <a:off x="2281218" y="5785772"/>
               <a:ext cx="161574" cy="80101"/>
             </a:xfrm>
             <a:prstGeom prst="rect">
@@ -5298,7 +5298,7 @@
           </p:nvSpPr>
           <p:spPr>
             <a:xfrm>
-              <a:off x="3217897" y="5785772"/>
+              <a:off x="3217496" y="5785772"/>
               <a:ext cx="161574" cy="80101"/>
             </a:xfrm>
             <a:prstGeom prst="rect">
@@ -5344,7 +5344,7 @@
           </p:nvSpPr>
           <p:spPr>
             <a:xfrm>
-              <a:off x="4204872" y="5785772"/>
+              <a:off x="4203472" y="5785772"/>
               <a:ext cx="62179" cy="80101"/>
             </a:xfrm>
             <a:prstGeom prst="rect">
@@ -5390,7 +5390,7 @@
           </p:nvSpPr>
           <p:spPr>
             <a:xfrm>
-              <a:off x="5111060" y="5785772"/>
+              <a:off x="5108660" y="5785772"/>
               <a:ext cx="124358" cy="80101"/>
             </a:xfrm>
             <a:prstGeom prst="rect">
@@ -5436,7 +5436,7 @@
           </p:nvSpPr>
           <p:spPr>
             <a:xfrm>
-              <a:off x="6048338" y="5785772"/>
+              <a:off x="6044938" y="5785772"/>
               <a:ext cx="124358" cy="80101"/>
             </a:xfrm>
             <a:prstGeom prst="rect">
@@ -5482,7 +5482,7 @@
           </p:nvSpPr>
           <p:spPr>
             <a:xfrm>
-              <a:off x="6985615" y="5785772"/>
+              <a:off x="6981216" y="5785772"/>
               <a:ext cx="124358" cy="80101"/>
             </a:xfrm>
             <a:prstGeom prst="rect">
@@ -5528,7 +5528,7 @@
           </p:nvSpPr>
           <p:spPr>
             <a:xfrm>
-              <a:off x="7922893" y="5785772"/>
+              <a:off x="7917494" y="5785772"/>
               <a:ext cx="124358" cy="80101"/>
             </a:xfrm>
             <a:prstGeom prst="rect">
@@ -5699,7 +5699,7 @@
                   <a:latin typeface="Helvetica"/>
                   <a:cs typeface="Helvetica"/>
                 </a:rPr>
-                <a:t>subHR per 10 % decline: 1.58 (1.19-2.08), p_Bonf = 0.008 (n = 6)  |  per IQR decline (Δ = 25.8 %): 3.23 (1.58-6.62)  |  IQR: [-10.7, 15.1] %</a:t>
+                <a:t>subHR per 10 % decline: 1.57 (1.19-2.08), p_Bonf = 0.008 (n = 6)  |  per IQR decline (Δ = 25.8 %): 3.23 (1.58-6.60)  |  IQR: [-10.6, 15.2] %</a:t>
               </a:r>
             </a:p>
           </p:txBody>
